--- a/documentation/TalentPilot-AI-Overview-Sails.pptx
+++ b/documentation/TalentPilot-AI-Overview-Sails.pptx
@@ -12,6 +12,7 @@
     <p:sldId id="260" r:id="rId11"/>
     <p:sldId id="261" r:id="rId12"/>
     <p:sldId id="262" r:id="rId13"/>
+    <p:sldId id="270" r:id="rId21"/>
     <p:sldId id="263" r:id="rId14"/>
     <p:sldId id="264" r:id="rId15"/>
     <p:sldId id="265" r:id="rId16"/>
@@ -3824,6 +3825,1129 @@
                 <a:latin typeface="Calibri"/>
               </a:rPr>
               <a:t>08</a:t>
+            </a:r>
+          </a:p>
+        </p:txBody>
+      </p:sp>
+      <p:sp>
+        <p:nvSpPr>
+          <p:cNvPr id="5" name="TextBox 4"/>
+          <p:cNvSpPr txBox="1"/>
+          <p:nvPr/>
+        </p:nvSpPr>
+        <p:spPr>
+          <a:xfrm>
+            <a:off x="502920" y="420624"/>
+            <a:ext cx="10515600" cy="594360"/>
+          </a:xfrm>
+          <a:prstGeom prst="rect">
+            <a:avLst/>
+          </a:prstGeom>
+          <a:noFill/>
+        </p:spPr>
+        <p:txBody>
+          <a:bodyPr wrap="square" anchor="t" lIns="0" rIns="0" tIns="0" bIns="0">
+            <a:spAutoFit/>
+          </a:bodyPr>
+          <a:lstStyle/>
+          <a:p>
+            <a:pPr algn="l">
+              <a:lnSpc>
+                <a:spcPct val="100000"/>
+              </a:lnSpc>
+            </a:pPr>
+            <a:r>
+              <a:rPr sz="2800" b="1" i="0">
+                <a:solidFill>
+                  <a:srgbClr val="FFFFFF"/>
+                </a:solidFill>
+                <a:latin typeface="Georgia"/>
+              </a:rPr>
+              <a:t>BMAD &amp; WDS Skills Used — What Each One Does (1/2)</a:t>
+            </a:r>
+          </a:p>
+        </p:txBody>
+      </p:sp>
+      <p:sp>
+        <p:nvSpPr>
+          <p:cNvPr id="6" name="TextBox 5"/>
+          <p:cNvSpPr txBox="1"/>
+          <p:nvPr/>
+        </p:nvSpPr>
+        <p:spPr>
+          <a:xfrm>
+            <a:off x="502920" y="1170432"/>
+            <a:ext cx="10972800" cy="365760"/>
+          </a:xfrm>
+          <a:prstGeom prst="rect">
+            <a:avLst/>
+          </a:prstGeom>
+          <a:noFill/>
+        </p:spPr>
+        <p:txBody>
+          <a:bodyPr wrap="square" anchor="t" lIns="0" rIns="0" tIns="0" bIns="0">
+            <a:spAutoFit/>
+          </a:bodyPr>
+          <a:lstStyle/>
+          <a:p>
+            <a:pPr algn="l">
+              <a:lnSpc>
+                <a:spcPct val="100000"/>
+              </a:lnSpc>
+            </a:pPr>
+            <a:r>
+              <a:rPr sz="1300" b="0" i="1">
+                <a:solidFill>
+                  <a:srgbClr val="5B665E"/>
+                </a:solidFill>
+                <a:latin typeface="Calibri"/>
+              </a:rPr>
+              <a:t>22 skill invocations were used to plan and build TalentPilot-AI end to end</a:t>
+            </a:r>
+          </a:p>
+        </p:txBody>
+      </p:sp>
+      <p:sp>
+        <p:nvSpPr>
+          <p:cNvPr id="7" name="TextBox 6"/>
+          <p:cNvSpPr txBox="1"/>
+          <p:nvPr/>
+        </p:nvSpPr>
+        <p:spPr>
+          <a:xfrm>
+            <a:off x="502920" y="6528816"/>
+            <a:ext cx="5486400" cy="274320"/>
+          </a:xfrm>
+          <a:prstGeom prst="rect">
+            <a:avLst/>
+          </a:prstGeom>
+          <a:noFill/>
+        </p:spPr>
+        <p:txBody>
+          <a:bodyPr wrap="square" anchor="t" lIns="0" rIns="0" tIns="0" bIns="0">
+            <a:spAutoFit/>
+          </a:bodyPr>
+          <a:lstStyle/>
+          <a:p>
+            <a:pPr algn="l">
+              <a:lnSpc>
+                <a:spcPct val="100000"/>
+              </a:lnSpc>
+            </a:pPr>
+            <a:r>
+              <a:rPr sz="900" b="0" i="0">
+                <a:solidFill>
+                  <a:srgbClr val="5B665E"/>
+                </a:solidFill>
+                <a:latin typeface="Calibri"/>
+              </a:rPr>
+              <a:t>TalentPilot-AI · SAILS Software Internal Pilot</a:t>
+            </a:r>
+          </a:p>
+        </p:txBody>
+      </p:sp>
+      <p:graphicFrame>
+        <p:nvGraphicFramePr>
+          <p:cNvPr id="8" name="Table 7"/>
+          <p:cNvGraphicFramePr>
+            <a:graphicFrameLocks noGrp="1"/>
+          </p:cNvGraphicFramePr>
+          <p:nvPr/>
+        </p:nvGraphicFramePr>
+        <p:xfrm>
+          <a:off x="502920" y="1554480"/>
+          <a:ext cx="11201400" cy="4892040"/>
+        </p:xfrm>
+        <a:graphic>
+          <a:graphicData uri="http://schemas.openxmlformats.org/drawingml/2006/table">
+            <a:tbl>
+              <a:tblPr firstRow="1" bandRow="1">
+                <a:tableStyleId>{5C22544A-7EE6-4342-B048-85BDC9FD1C3A}</a:tableStyleId>
+              </a:tblPr>
+              <a:tblGrid>
+                <a:gridCol w="457200"/>
+                <a:gridCol w="3200400"/>
+                <a:gridCol w="7543800"/>
+              </a:tblGrid>
+              <a:tr h="407670">
+                <a:tc>
+                  <a:txBody>
+                    <a:bodyPr/>
+                    <a:lstStyle/>
+                    <a:p>
+                      <a:pPr algn="l"/>
+                      <a:r>
+                        <a:rPr b="1" sz="1300">
+                          <a:solidFill>
+                            <a:srgbClr val="FFFFFF"/>
+                          </a:solidFill>
+                          <a:latin typeface="Calibri"/>
+                        </a:rPr>
+                        <a:t>#</a:t>
+                      </a:r>
+                    </a:p>
+                  </a:txBody>
+                  <a:tcPr anchor="ctr">
+                    <a:solidFill>
+                      <a:srgbClr val="123D30"/>
+                    </a:solidFill>
+                  </a:tcPr>
+                </a:tc>
+                <a:tc>
+                  <a:txBody>
+                    <a:bodyPr/>
+                    <a:lstStyle/>
+                    <a:p>
+                      <a:pPr algn="l"/>
+                      <a:r>
+                        <a:rPr b="1" sz="1300">
+                          <a:solidFill>
+                            <a:srgbClr val="FFFFFF"/>
+                          </a:solidFill>
+                          <a:latin typeface="Calibri"/>
+                        </a:rPr>
+                        <a:t>Skill</a:t>
+                      </a:r>
+                    </a:p>
+                  </a:txBody>
+                  <a:tcPr anchor="ctr">
+                    <a:solidFill>
+                      <a:srgbClr val="123D30"/>
+                    </a:solidFill>
+                  </a:tcPr>
+                </a:tc>
+                <a:tc>
+                  <a:txBody>
+                    <a:bodyPr/>
+                    <a:lstStyle/>
+                    <a:p>
+                      <a:pPr algn="l"/>
+                      <a:r>
+                        <a:rPr b="1" sz="1300">
+                          <a:solidFill>
+                            <a:srgbClr val="FFFFFF"/>
+                          </a:solidFill>
+                          <a:latin typeface="Calibri"/>
+                        </a:rPr>
+                        <a:t>What it does, in one line</a:t>
+                      </a:r>
+                    </a:p>
+                  </a:txBody>
+                  <a:tcPr anchor="ctr">
+                    <a:solidFill>
+                      <a:srgbClr val="123D30"/>
+                    </a:solidFill>
+                  </a:tcPr>
+                </a:tc>
+              </a:tr>
+              <a:tr h="407670">
+                <a:tc>
+                  <a:txBody>
+                    <a:bodyPr/>
+                    <a:lstStyle/>
+                    <a:p>
+                      <a:r>
+                        <a:rPr sz="1150">
+                          <a:solidFill>
+                            <a:srgbClr val="222A24"/>
+                          </a:solidFill>
+                          <a:latin typeface="Calibri"/>
+                        </a:rPr>
+                        <a:t>1</a:t>
+                      </a:r>
+                    </a:p>
+                  </a:txBody>
+                  <a:tcPr anchor="ctr" marT="50800" marB="50800">
+                    <a:solidFill>
+                      <a:srgbClr val="FFFFFF"/>
+                    </a:solidFill>
+                  </a:tcPr>
+                </a:tc>
+                <a:tc>
+                  <a:txBody>
+                    <a:bodyPr/>
+                    <a:lstStyle/>
+                    <a:p>
+                      <a:r>
+                        <a:rPr sz="1150">
+                          <a:solidFill>
+                            <a:srgbClr val="222A24"/>
+                          </a:solidFill>
+                          <a:latin typeface="Calibri"/>
+                        </a:rPr>
+                        <a:t>/bmad-cis-agent-brainstorming-coach</a:t>
+                      </a:r>
+                    </a:p>
+                  </a:txBody>
+                  <a:tcPr anchor="ctr" marT="50800" marB="50800">
+                    <a:solidFill>
+                      <a:srgbClr val="FFFFFF"/>
+                    </a:solidFill>
+                  </a:tcPr>
+                </a:tc>
+                <a:tc>
+                  <a:txBody>
+                    <a:bodyPr/>
+                    <a:lstStyle/>
+                    <a:p>
+                      <a:r>
+                        <a:rPr sz="1150">
+                          <a:solidFill>
+                            <a:srgbClr val="222A24"/>
+                          </a:solidFill>
+                          <a:latin typeface="Calibri"/>
+                        </a:rPr>
+                        <a:t>Carson: elite facilitator who runs structured, technique-driven ideation sessions.</a:t>
+                      </a:r>
+                    </a:p>
+                  </a:txBody>
+                  <a:tcPr anchor="ctr" marT="50800" marB="50800">
+                    <a:solidFill>
+                      <a:srgbClr val="FFFFFF"/>
+                    </a:solidFill>
+                  </a:tcPr>
+                </a:tc>
+              </a:tr>
+              <a:tr h="407670">
+                <a:tc>
+                  <a:txBody>
+                    <a:bodyPr/>
+                    <a:lstStyle/>
+                    <a:p>
+                      <a:r>
+                        <a:rPr sz="1150">
+                          <a:solidFill>
+                            <a:srgbClr val="222A24"/>
+                          </a:solidFill>
+                          <a:latin typeface="Calibri"/>
+                        </a:rPr>
+                        <a:t>2</a:t>
+                      </a:r>
+                    </a:p>
+                  </a:txBody>
+                  <a:tcPr anchor="ctr" marT="50800" marB="50800">
+                    <a:solidFill>
+                      <a:srgbClr val="F1ECDD"/>
+                    </a:solidFill>
+                  </a:tcPr>
+                </a:tc>
+                <a:tc>
+                  <a:txBody>
+                    <a:bodyPr/>
+                    <a:lstStyle/>
+                    <a:p>
+                      <a:r>
+                        <a:rPr sz="1150">
+                          <a:solidFill>
+                            <a:srgbClr val="222A24"/>
+                          </a:solidFill>
+                          <a:latin typeface="Calibri"/>
+                        </a:rPr>
+                        <a:t>/bmad-forge-idea</a:t>
+                      </a:r>
+                    </a:p>
+                  </a:txBody>
+                  <a:tcPr anchor="ctr" marT="50800" marB="50800">
+                    <a:solidFill>
+                      <a:srgbClr val="F1ECDD"/>
+                    </a:solidFill>
+                  </a:tcPr>
+                </a:tc>
+                <a:tc>
+                  <a:txBody>
+                    <a:bodyPr/>
+                    <a:lstStyle/>
+                    <a:p>
+                      <a:r>
+                        <a:rPr sz="1150">
+                          <a:solidFill>
+                            <a:srgbClr val="222A24"/>
+                          </a:solidFill>
+                          <a:latin typeface="Calibri"/>
+                        </a:rPr>
+                        <a:t>Pressure-tests an idea via persona-driven interrogation until it hardens, proves out, or dies cheaply.</a:t>
+                      </a:r>
+                    </a:p>
+                  </a:txBody>
+                  <a:tcPr anchor="ctr" marT="50800" marB="50800">
+                    <a:solidFill>
+                      <a:srgbClr val="F1ECDD"/>
+                    </a:solidFill>
+                  </a:tcPr>
+                </a:tc>
+              </a:tr>
+              <a:tr h="407670">
+                <a:tc>
+                  <a:txBody>
+                    <a:bodyPr/>
+                    <a:lstStyle/>
+                    <a:p>
+                      <a:r>
+                        <a:rPr sz="1150">
+                          <a:solidFill>
+                            <a:srgbClr val="222A24"/>
+                          </a:solidFill>
+                          <a:latin typeface="Calibri"/>
+                        </a:rPr>
+                        <a:t>3</a:t>
+                      </a:r>
+                    </a:p>
+                  </a:txBody>
+                  <a:tcPr anchor="ctr" marT="50800" marB="50800">
+                    <a:solidFill>
+                      <a:srgbClr val="FFFFFF"/>
+                    </a:solidFill>
+                  </a:tcPr>
+                </a:tc>
+                <a:tc>
+                  <a:txBody>
+                    <a:bodyPr/>
+                    <a:lstStyle/>
+                    <a:p>
+                      <a:r>
+                        <a:rPr sz="1150">
+                          <a:solidFill>
+                            <a:srgbClr val="222A24"/>
+                          </a:solidFill>
+                          <a:latin typeface="Calibri"/>
+                        </a:rPr>
+                        <a:t>/bmad-project-context</a:t>
+                      </a:r>
+                    </a:p>
+                  </a:txBody>
+                  <a:tcPr anchor="ctr" marT="50800" marB="50800">
+                    <a:solidFill>
+                      <a:srgbClr val="FFFFFF"/>
+                    </a:solidFill>
+                  </a:tcPr>
+                </a:tc>
+                <a:tc>
+                  <a:txBody>
+                    <a:bodyPr/>
+                    <a:lstStyle/>
+                    <a:p>
+                      <a:r>
+                        <a:rPr sz="1150">
+                          <a:solidFill>
+                            <a:srgbClr val="222A24"/>
+                          </a:solidFill>
+                          <a:latin typeface="Calibri"/>
+                        </a:rPr>
+                        <a:t>Generates project-context.md — the AI working rules/conventions for the whole project.</a:t>
+                      </a:r>
+                    </a:p>
+                  </a:txBody>
+                  <a:tcPr anchor="ctr" marT="50800" marB="50800">
+                    <a:solidFill>
+                      <a:srgbClr val="FFFFFF"/>
+                    </a:solidFill>
+                  </a:tcPr>
+                </a:tc>
+              </a:tr>
+              <a:tr h="407670">
+                <a:tc>
+                  <a:txBody>
+                    <a:bodyPr/>
+                    <a:lstStyle/>
+                    <a:p>
+                      <a:r>
+                        <a:rPr sz="1150">
+                          <a:solidFill>
+                            <a:srgbClr val="222A24"/>
+                          </a:solidFill>
+                          <a:latin typeface="Calibri"/>
+                        </a:rPr>
+                        <a:t>4</a:t>
+                      </a:r>
+                    </a:p>
+                  </a:txBody>
+                  <a:tcPr anchor="ctr" marT="50800" marB="50800">
+                    <a:solidFill>
+                      <a:srgbClr val="F1ECDD"/>
+                    </a:solidFill>
+                  </a:tcPr>
+                </a:tc>
+                <a:tc>
+                  <a:txBody>
+                    <a:bodyPr/>
+                    <a:lstStyle/>
+                    <a:p>
+                      <a:r>
+                        <a:rPr sz="1150">
+                          <a:solidFill>
+                            <a:srgbClr val="222A24"/>
+                          </a:solidFill>
+                          <a:latin typeface="Calibri"/>
+                        </a:rPr>
+                        <a:t>/bmad-cis-agent-design-thinking-coach</a:t>
+                      </a:r>
+                    </a:p>
+                  </a:txBody>
+                  <a:tcPr anchor="ctr" marT="50800" marB="50800">
+                    <a:solidFill>
+                      <a:srgbClr val="F1ECDD"/>
+                    </a:solidFill>
+                  </a:tcPr>
+                </a:tc>
+                <a:tc>
+                  <a:txBody>
+                    <a:bodyPr/>
+                    <a:lstStyle/>
+                    <a:p>
+                      <a:r>
+                        <a:rPr sz="1150">
+                          <a:solidFill>
+                            <a:srgbClr val="222A24"/>
+                          </a:solidFill>
+                          <a:latin typeface="Calibri"/>
+                        </a:rPr>
+                        <a:t>Maya: guides empathy-driven, human-centered design thinking sessions.</a:t>
+                      </a:r>
+                    </a:p>
+                  </a:txBody>
+                  <a:tcPr anchor="ctr" marT="50800" marB="50800">
+                    <a:solidFill>
+                      <a:srgbClr val="F1ECDD"/>
+                    </a:solidFill>
+                  </a:tcPr>
+                </a:tc>
+              </a:tr>
+              <a:tr h="407670">
+                <a:tc>
+                  <a:txBody>
+                    <a:bodyPr/>
+                    <a:lstStyle/>
+                    <a:p>
+                      <a:r>
+                        <a:rPr sz="1150">
+                          <a:solidFill>
+                            <a:srgbClr val="222A24"/>
+                          </a:solidFill>
+                          <a:latin typeface="Calibri"/>
+                        </a:rPr>
+                        <a:t>5</a:t>
+                      </a:r>
+                    </a:p>
+                  </a:txBody>
+                  <a:tcPr anchor="ctr" marT="50800" marB="50800">
+                    <a:solidFill>
+                      <a:srgbClr val="FFFFFF"/>
+                    </a:solidFill>
+                  </a:tcPr>
+                </a:tc>
+                <a:tc>
+                  <a:txBody>
+                    <a:bodyPr/>
+                    <a:lstStyle/>
+                    <a:p>
+                      <a:r>
+                        <a:rPr sz="1150">
+                          <a:solidFill>
+                            <a:srgbClr val="222A24"/>
+                          </a:solidFill>
+                          <a:latin typeface="Calibri"/>
+                        </a:rPr>
+                        <a:t>/bmad-cis-agent-innovation-coach</a:t>
+                      </a:r>
+                    </a:p>
+                  </a:txBody>
+                  <a:tcPr anchor="ctr" marT="50800" marB="50800">
+                    <a:solidFill>
+                      <a:srgbClr val="FFFFFF"/>
+                    </a:solidFill>
+                  </a:tcPr>
+                </a:tc>
+                <a:tc>
+                  <a:txBody>
+                    <a:bodyPr/>
+                    <a:lstStyle/>
+                    <a:p>
+                      <a:r>
+                        <a:rPr sz="1150">
+                          <a:solidFill>
+                            <a:srgbClr val="222A24"/>
+                          </a:solidFill>
+                          <a:latin typeface="Calibri"/>
+                        </a:rPr>
+                        <a:t>Victor: disruptive-innovation strategist finding business-model disruption angles.</a:t>
+                      </a:r>
+                    </a:p>
+                  </a:txBody>
+                  <a:tcPr anchor="ctr" marT="50800" marB="50800">
+                    <a:solidFill>
+                      <a:srgbClr val="FFFFFF"/>
+                    </a:solidFill>
+                  </a:tcPr>
+                </a:tc>
+              </a:tr>
+              <a:tr h="407670">
+                <a:tc>
+                  <a:txBody>
+                    <a:bodyPr/>
+                    <a:lstStyle/>
+                    <a:p>
+                      <a:r>
+                        <a:rPr sz="1150">
+                          <a:solidFill>
+                            <a:srgbClr val="222A24"/>
+                          </a:solidFill>
+                          <a:latin typeface="Calibri"/>
+                        </a:rPr>
+                        <a:t>6</a:t>
+                      </a:r>
+                    </a:p>
+                  </a:txBody>
+                  <a:tcPr anchor="ctr" marT="50800" marB="50800">
+                    <a:solidFill>
+                      <a:srgbClr val="F1ECDD"/>
+                    </a:solidFill>
+                  </a:tcPr>
+                </a:tc>
+                <a:tc>
+                  <a:txBody>
+                    <a:bodyPr/>
+                    <a:lstStyle/>
+                    <a:p>
+                      <a:r>
+                        <a:rPr sz="1150">
+                          <a:solidFill>
+                            <a:srgbClr val="222A24"/>
+                          </a:solidFill>
+                          <a:latin typeface="Calibri"/>
+                        </a:rPr>
+                        <a:t>/bmad-market-research</a:t>
+                      </a:r>
+                    </a:p>
+                  </a:txBody>
+                  <a:tcPr anchor="ctr" marT="50800" marB="50800">
+                    <a:solidFill>
+                      <a:srgbClr val="F1ECDD"/>
+                    </a:solidFill>
+                  </a:tcPr>
+                </a:tc>
+                <a:tc>
+                  <a:txBody>
+                    <a:bodyPr/>
+                    <a:lstStyle/>
+                    <a:p>
+                      <a:r>
+                        <a:rPr sz="1150">
+                          <a:solidFill>
+                            <a:srgbClr val="222A24"/>
+                          </a:solidFill>
+                          <a:latin typeface="Calibri"/>
+                        </a:rPr>
+                        <a:t>Researches the competitive market and target customers.</a:t>
+                      </a:r>
+                    </a:p>
+                  </a:txBody>
+                  <a:tcPr anchor="ctr" marT="50800" marB="50800">
+                    <a:solidFill>
+                      <a:srgbClr val="F1ECDD"/>
+                    </a:solidFill>
+                  </a:tcPr>
+                </a:tc>
+              </a:tr>
+              <a:tr h="407670">
+                <a:tc>
+                  <a:txBody>
+                    <a:bodyPr/>
+                    <a:lstStyle/>
+                    <a:p>
+                      <a:r>
+                        <a:rPr sz="1150">
+                          <a:solidFill>
+                            <a:srgbClr val="222A24"/>
+                          </a:solidFill>
+                          <a:latin typeface="Calibri"/>
+                        </a:rPr>
+                        <a:t>7</a:t>
+                      </a:r>
+                    </a:p>
+                  </a:txBody>
+                  <a:tcPr anchor="ctr" marT="50800" marB="50800">
+                    <a:solidFill>
+                      <a:srgbClr val="FFFFFF"/>
+                    </a:solidFill>
+                  </a:tcPr>
+                </a:tc>
+                <a:tc>
+                  <a:txBody>
+                    <a:bodyPr/>
+                    <a:lstStyle/>
+                    <a:p>
+                      <a:r>
+                        <a:rPr sz="1150">
+                          <a:solidFill>
+                            <a:srgbClr val="222A24"/>
+                          </a:solidFill>
+                          <a:latin typeface="Calibri"/>
+                        </a:rPr>
+                        <a:t>/bmad-domain-research</a:t>
+                      </a:r>
+                    </a:p>
+                  </a:txBody>
+                  <a:tcPr anchor="ctr" marT="50800" marB="50800">
+                    <a:solidFill>
+                      <a:srgbClr val="FFFFFF"/>
+                    </a:solidFill>
+                  </a:tcPr>
+                </a:tc>
+                <a:tc>
+                  <a:txBody>
+                    <a:bodyPr/>
+                    <a:lstStyle/>
+                    <a:p>
+                      <a:r>
+                        <a:rPr sz="1150">
+                          <a:solidFill>
+                            <a:srgbClr val="222A24"/>
+                          </a:solidFill>
+                          <a:latin typeface="Calibri"/>
+                        </a:rPr>
+                        <a:t>Researches the domain/industry the product operates in.</a:t>
+                      </a:r>
+                    </a:p>
+                  </a:txBody>
+                  <a:tcPr anchor="ctr" marT="50800" marB="50800">
+                    <a:solidFill>
+                      <a:srgbClr val="FFFFFF"/>
+                    </a:solidFill>
+                  </a:tcPr>
+                </a:tc>
+              </a:tr>
+              <a:tr h="407670">
+                <a:tc>
+                  <a:txBody>
+                    <a:bodyPr/>
+                    <a:lstStyle/>
+                    <a:p>
+                      <a:r>
+                        <a:rPr sz="1150">
+                          <a:solidFill>
+                            <a:srgbClr val="222A24"/>
+                          </a:solidFill>
+                          <a:latin typeface="Calibri"/>
+                        </a:rPr>
+                        <a:t>8</a:t>
+                      </a:r>
+                    </a:p>
+                  </a:txBody>
+                  <a:tcPr anchor="ctr" marT="50800" marB="50800">
+                    <a:solidFill>
+                      <a:srgbClr val="F1ECDD"/>
+                    </a:solidFill>
+                  </a:tcPr>
+                </a:tc>
+                <a:tc>
+                  <a:txBody>
+                    <a:bodyPr/>
+                    <a:lstStyle/>
+                    <a:p>
+                      <a:r>
+                        <a:rPr sz="1150">
+                          <a:solidFill>
+                            <a:srgbClr val="222A24"/>
+                          </a:solidFill>
+                          <a:latin typeface="Calibri"/>
+                        </a:rPr>
+                        <a:t>/bmad-technical-research</a:t>
+                      </a:r>
+                    </a:p>
+                  </a:txBody>
+                  <a:tcPr anchor="ctr" marT="50800" marB="50800">
+                    <a:solidFill>
+                      <a:srgbClr val="F1ECDD"/>
+                    </a:solidFill>
+                  </a:tcPr>
+                </a:tc>
+                <a:tc>
+                  <a:txBody>
+                    <a:bodyPr/>
+                    <a:lstStyle/>
+                    <a:p>
+                      <a:r>
+                        <a:rPr sz="1150">
+                          <a:solidFill>
+                            <a:srgbClr val="222A24"/>
+                          </a:solidFill>
+                          <a:latin typeface="Calibri"/>
+                        </a:rPr>
+                        <a:t>Researches candidate technologies, stacks, and architecture approaches.</a:t>
+                      </a:r>
+                    </a:p>
+                  </a:txBody>
+                  <a:tcPr anchor="ctr" marT="50800" marB="50800">
+                    <a:solidFill>
+                      <a:srgbClr val="F1ECDD"/>
+                    </a:solidFill>
+                  </a:tcPr>
+                </a:tc>
+              </a:tr>
+              <a:tr h="407670">
+                <a:tc>
+                  <a:txBody>
+                    <a:bodyPr/>
+                    <a:lstStyle/>
+                    <a:p>
+                      <a:r>
+                        <a:rPr sz="1150">
+                          <a:solidFill>
+                            <a:srgbClr val="222A24"/>
+                          </a:solidFill>
+                          <a:latin typeface="Calibri"/>
+                        </a:rPr>
+                        <a:t>9</a:t>
+                      </a:r>
+                    </a:p>
+                  </a:txBody>
+                  <a:tcPr anchor="ctr" marT="50800" marB="50800">
+                    <a:solidFill>
+                      <a:srgbClr val="FFFFFF"/>
+                    </a:solidFill>
+                  </a:tcPr>
+                </a:tc>
+                <a:tc>
+                  <a:txBody>
+                    <a:bodyPr/>
+                    <a:lstStyle/>
+                    <a:p>
+                      <a:r>
+                        <a:rPr sz="1150">
+                          <a:solidFill>
+                            <a:srgbClr val="222A24"/>
+                          </a:solidFill>
+                          <a:latin typeface="Calibri"/>
+                        </a:rPr>
+                        <a:t>/bmad-product-brief</a:t>
+                      </a:r>
+                    </a:p>
+                  </a:txBody>
+                  <a:tcPr anchor="ctr" marT="50800" marB="50800">
+                    <a:solidFill>
+                      <a:srgbClr val="FFFFFF"/>
+                    </a:solidFill>
+                  </a:tcPr>
+                </a:tc>
+                <a:tc>
+                  <a:txBody>
+                    <a:bodyPr/>
+                    <a:lstStyle/>
+                    <a:p>
+                      <a:r>
+                        <a:rPr sz="1150">
+                          <a:solidFill>
+                            <a:srgbClr val="222A24"/>
+                          </a:solidFill>
+                          <a:latin typeface="Calibri"/>
+                        </a:rPr>
+                        <a:t>Produces/validates the product brief — vision, users, positioning, business case.</a:t>
+                      </a:r>
+                    </a:p>
+                  </a:txBody>
+                  <a:tcPr anchor="ctr" marT="50800" marB="50800">
+                    <a:solidFill>
+                      <a:srgbClr val="FFFFFF"/>
+                    </a:solidFill>
+                  </a:tcPr>
+                </a:tc>
+              </a:tr>
+              <a:tr h="407670">
+                <a:tc>
+                  <a:txBody>
+                    <a:bodyPr/>
+                    <a:lstStyle/>
+                    <a:p>
+                      <a:r>
+                        <a:rPr sz="1150">
+                          <a:solidFill>
+                            <a:srgbClr val="222A24"/>
+                          </a:solidFill>
+                          <a:latin typeface="Calibri"/>
+                        </a:rPr>
+                        <a:t>10</a:t>
+                      </a:r>
+                    </a:p>
+                  </a:txBody>
+                  <a:tcPr anchor="ctr" marT="50800" marB="50800">
+                    <a:solidFill>
+                      <a:srgbClr val="F1ECDD"/>
+                    </a:solidFill>
+                  </a:tcPr>
+                </a:tc>
+                <a:tc>
+                  <a:txBody>
+                    <a:bodyPr/>
+                    <a:lstStyle/>
+                    <a:p>
+                      <a:r>
+                        <a:rPr sz="1150">
+                          <a:solidFill>
+                            <a:srgbClr val="222A24"/>
+                          </a:solidFill>
+                          <a:latin typeface="Calibri"/>
+                        </a:rPr>
+                        <a:t>/bmad-prfaq</a:t>
+                      </a:r>
+                    </a:p>
+                  </a:txBody>
+                  <a:tcPr anchor="ctr" marT="50800" marB="50800">
+                    <a:solidFill>
+                      <a:srgbClr val="F1ECDD"/>
+                    </a:solidFill>
+                  </a:tcPr>
+                </a:tc>
+                <a:tc>
+                  <a:txBody>
+                    <a:bodyPr/>
+                    <a:lstStyle/>
+                    <a:p>
+                      <a:r>
+                        <a:rPr sz="1150">
+                          <a:solidFill>
+                            <a:srgbClr val="222A24"/>
+                          </a:solidFill>
+                          <a:latin typeface="Calibri"/>
+                        </a:rPr>
+                        <a:t>Runs a Working-Backwards PRFAQ challenge to stress-test the concept customer-first.</a:t>
+                      </a:r>
+                    </a:p>
+                  </a:txBody>
+                  <a:tcPr anchor="ctr" marT="50800" marB="50800">
+                    <a:solidFill>
+                      <a:srgbClr val="F1ECDD"/>
+                    </a:solidFill>
+                  </a:tcPr>
+                </a:tc>
+              </a:tr>
+              <a:tr h="407670">
+                <a:tc>
+                  <a:txBody>
+                    <a:bodyPr/>
+                    <a:lstStyle/>
+                    <a:p>
+                      <a:r>
+                        <a:rPr sz="1150">
+                          <a:solidFill>
+                            <a:srgbClr val="222A24"/>
+                          </a:solidFill>
+                          <a:latin typeface="Calibri"/>
+                        </a:rPr>
+                        <a:t>11</a:t>
+                      </a:r>
+                    </a:p>
+                  </a:txBody>
+                  <a:tcPr anchor="ctr" marT="50800" marB="50800">
+                    <a:solidFill>
+                      <a:srgbClr val="FFFFFF"/>
+                    </a:solidFill>
+                  </a:tcPr>
+                </a:tc>
+                <a:tc>
+                  <a:txBody>
+                    <a:bodyPr/>
+                    <a:lstStyle/>
+                    <a:p>
+                      <a:r>
+                        <a:rPr sz="1150">
+                          <a:solidFill>
+                            <a:srgbClr val="222A24"/>
+                          </a:solidFill>
+                          <a:latin typeface="Calibri"/>
+                        </a:rPr>
+                        <a:t>/wds-1-project-brief</a:t>
+                      </a:r>
+                    </a:p>
+                  </a:txBody>
+                  <a:tcPr anchor="ctr" marT="50800" marB="50800">
+                    <a:solidFill>
+                      <a:srgbClr val="FFFFFF"/>
+                    </a:solidFill>
+                  </a:tcPr>
+                </a:tc>
+                <a:tc>
+                  <a:txBody>
+                    <a:bodyPr/>
+                    <a:lstStyle/>
+                    <a:p>
+                      <a:r>
+                        <a:rPr sz="1150">
+                          <a:solidFill>
+                            <a:srgbClr val="222A24"/>
+                          </a:solidFill>
+                          <a:latin typeface="Calibri"/>
+                        </a:rPr>
+                        <a:t>Establishes the WDS project foundation that all downstream design work builds on.</a:t>
+                      </a:r>
+                    </a:p>
+                  </a:txBody>
+                  <a:tcPr anchor="ctr" marT="50800" marB="50800">
+                    <a:solidFill>
+                      <a:srgbClr val="FFFFFF"/>
+                    </a:solidFill>
+                  </a:tcPr>
+                </a:tc>
+              </a:tr>
+            </a:tbl>
+          </a:graphicData>
+        </a:graphic>
+      </p:graphicFrame>
+    </p:spTree>
+  </p:cSld>
+  <p:clrMapOvr>
+    <a:masterClrMapping/>
+  </p:clrMapOvr>
+</p:sld>
+</file>
+
+<file path=ppt/slides/slide11.xml><?xml version="1.0" encoding="utf-8"?>
+<p:sld xmlns:a="http://schemas.openxmlformats.org/drawingml/2006/main" xmlns:p="http://schemas.openxmlformats.org/presentationml/2006/main" xmlns:r="http://schemas.openxmlformats.org/officeDocument/2006/relationships">
+  <p:cSld>
+    <p:bg>
+      <p:bgPr>
+        <a:blipFill dpi="0" rotWithShape="1">
+          <a:blip r:embed="rId2">
+            <a:alphaModFix amt="6000"/>
+            <a:lum/>
+          </a:blip>
+          <a:srcRect/>
+          <a:stretch>
+            <a:fillRect/>
+          </a:stretch>
+        </a:blipFill>
+        <a:effectLst/>
+      </p:bgPr>
+    </p:bg>
+    <p:spTree>
+      <p:nvGrpSpPr>
+        <p:cNvPr id="1" name=""/>
+        <p:cNvGrpSpPr/>
+        <p:nvPr/>
+      </p:nvGrpSpPr>
+      <p:grpSpPr/>
+      <p:sp>
+        <p:nvSpPr>
+          <p:cNvPr id="2" name="Rectangle 1"/>
+          <p:cNvSpPr/>
+          <p:nvPr/>
+        </p:nvSpPr>
+        <p:spPr>
+          <a:xfrm>
+            <a:off x="0" y="0"/>
+            <a:ext cx="12191695" cy="1051560"/>
+          </a:xfrm>
+          <a:prstGeom prst="rect">
+            <a:avLst/>
+          </a:prstGeom>
+          <a:solidFill>
+            <a:srgbClr val="123D30"/>
+          </a:solidFill>
+          <a:ln>
+            <a:noFill/>
+          </a:ln>
+          <a:effectLst/>
+        </p:spPr>
+        <p:style>
+          <a:lnRef idx="1">
+            <a:schemeClr val="accent1"/>
+          </a:lnRef>
+          <a:fillRef idx="3">
+            <a:schemeClr val="accent1"/>
+          </a:fillRef>
+          <a:effectRef idx="2">
+            <a:schemeClr val="accent1"/>
+          </a:effectRef>
+          <a:fontRef idx="minor">
+            <a:schemeClr val="lt1"/>
+          </a:fontRef>
+        </p:style>
+        <p:txBody>
+          <a:bodyPr rtlCol="0" anchor="ctr"/>
+          <a:lstStyle/>
+          <a:p>
+            <a:pPr algn="ctr"/>
+          </a:p>
+        </p:txBody>
+      </p:sp>
+      <p:sp>
+        <p:nvSpPr>
+          <p:cNvPr id="3" name="Rectangle 2"/>
+          <p:cNvSpPr/>
+          <p:nvPr/>
+        </p:nvSpPr>
+        <p:spPr>
+          <a:xfrm>
+            <a:off x="0" y="1051560"/>
+            <a:ext cx="12191695" cy="38100"/>
+          </a:xfrm>
+          <a:prstGeom prst="rect">
+            <a:avLst/>
+          </a:prstGeom>
+          <a:solidFill>
+            <a:srgbClr val="C99A3E"/>
+          </a:solidFill>
+          <a:ln>
+            <a:noFill/>
+          </a:ln>
+          <a:effectLst/>
+        </p:spPr>
+        <p:style>
+          <a:lnRef idx="1">
+            <a:schemeClr val="accent1"/>
+          </a:lnRef>
+          <a:fillRef idx="3">
+            <a:schemeClr val="accent1"/>
+          </a:fillRef>
+          <a:effectRef idx="2">
+            <a:schemeClr val="accent1"/>
+          </a:effectRef>
+          <a:fontRef idx="minor">
+            <a:schemeClr val="lt1"/>
+          </a:fontRef>
+        </p:style>
+        <p:txBody>
+          <a:bodyPr rtlCol="0" anchor="ctr"/>
+          <a:lstStyle/>
+          <a:p>
+            <a:pPr algn="ctr"/>
+          </a:p>
+        </p:txBody>
+      </p:sp>
+      <p:sp>
+        <p:nvSpPr>
+          <p:cNvPr id="4" name="TextBox 3"/>
+          <p:cNvSpPr txBox="1"/>
+          <p:nvPr/>
+        </p:nvSpPr>
+        <p:spPr>
+          <a:xfrm>
+            <a:off x="502920" y="128016"/>
+            <a:ext cx="1371600" cy="365760"/>
+          </a:xfrm>
+          <a:prstGeom prst="rect">
+            <a:avLst/>
+          </a:prstGeom>
+          <a:noFill/>
+        </p:spPr>
+        <p:txBody>
+          <a:bodyPr wrap="square" anchor="t" lIns="0" rIns="0" tIns="0" bIns="0">
+            <a:spAutoFit/>
+          </a:bodyPr>
+          <a:lstStyle/>
+          <a:p>
+            <a:pPr algn="l">
+              <a:lnSpc>
+                <a:spcPct val="100000"/>
+              </a:lnSpc>
+            </a:pPr>
+            <a:r>
+              <a:rPr sz="1500" b="1" i="0">
+                <a:solidFill>
+                  <a:srgbClr val="4FB093"/>
+                </a:solidFill>
+                <a:latin typeface="Calibri"/>
+              </a:rPr>
+              <a:t>09</a:t>
             </a:r>
           </a:p>
         </p:txBody>
@@ -4799,1078 +5923,6 @@
 </p:sld>
 </file>
 
-<file path=ppt/slides/slide11.xml><?xml version="1.0" encoding="utf-8"?>
-<p:sld xmlns:a="http://schemas.openxmlformats.org/drawingml/2006/main" xmlns:p="http://schemas.openxmlformats.org/presentationml/2006/main" xmlns:r="http://schemas.openxmlformats.org/officeDocument/2006/relationships">
-  <p:cSld>
-    <p:bg>
-      <p:bgPr>
-        <a:blipFill dpi="0" rotWithShape="1">
-          <a:blip r:embed="rId2">
-            <a:alphaModFix amt="6000"/>
-            <a:lum/>
-          </a:blip>
-          <a:srcRect/>
-          <a:stretch>
-            <a:fillRect/>
-          </a:stretch>
-        </a:blipFill>
-        <a:effectLst/>
-      </p:bgPr>
-    </p:bg>
-    <p:spTree>
-      <p:nvGrpSpPr>
-        <p:cNvPr id="1" name=""/>
-        <p:cNvGrpSpPr/>
-        <p:nvPr/>
-      </p:nvGrpSpPr>
-      <p:grpSpPr/>
-      <p:sp>
-        <p:nvSpPr>
-          <p:cNvPr id="2" name="Rectangle 1"/>
-          <p:cNvSpPr/>
-          <p:nvPr/>
-        </p:nvSpPr>
-        <p:spPr>
-          <a:xfrm>
-            <a:off x="0" y="0"/>
-            <a:ext cx="12191695" cy="1051560"/>
-          </a:xfrm>
-          <a:prstGeom prst="rect">
-            <a:avLst/>
-          </a:prstGeom>
-          <a:solidFill>
-            <a:srgbClr val="123D30"/>
-          </a:solidFill>
-          <a:ln>
-            <a:noFill/>
-          </a:ln>
-          <a:effectLst/>
-        </p:spPr>
-        <p:style>
-          <a:lnRef idx="1">
-            <a:schemeClr val="accent1"/>
-          </a:lnRef>
-          <a:fillRef idx="3">
-            <a:schemeClr val="accent1"/>
-          </a:fillRef>
-          <a:effectRef idx="2">
-            <a:schemeClr val="accent1"/>
-          </a:effectRef>
-          <a:fontRef idx="minor">
-            <a:schemeClr val="lt1"/>
-          </a:fontRef>
-        </p:style>
-        <p:txBody>
-          <a:bodyPr rtlCol="0" anchor="ctr"/>
-          <a:lstStyle/>
-          <a:p>
-            <a:pPr algn="ctr"/>
-          </a:p>
-        </p:txBody>
-      </p:sp>
-      <p:sp>
-        <p:nvSpPr>
-          <p:cNvPr id="3" name="Rectangle 2"/>
-          <p:cNvSpPr/>
-          <p:nvPr/>
-        </p:nvSpPr>
-        <p:spPr>
-          <a:xfrm>
-            <a:off x="0" y="1051560"/>
-            <a:ext cx="12191695" cy="38100"/>
-          </a:xfrm>
-          <a:prstGeom prst="rect">
-            <a:avLst/>
-          </a:prstGeom>
-          <a:solidFill>
-            <a:srgbClr val="C99A3E"/>
-          </a:solidFill>
-          <a:ln>
-            <a:noFill/>
-          </a:ln>
-          <a:effectLst/>
-        </p:spPr>
-        <p:style>
-          <a:lnRef idx="1">
-            <a:schemeClr val="accent1"/>
-          </a:lnRef>
-          <a:fillRef idx="3">
-            <a:schemeClr val="accent1"/>
-          </a:fillRef>
-          <a:effectRef idx="2">
-            <a:schemeClr val="accent1"/>
-          </a:effectRef>
-          <a:fontRef idx="minor">
-            <a:schemeClr val="lt1"/>
-          </a:fontRef>
-        </p:style>
-        <p:txBody>
-          <a:bodyPr rtlCol="0" anchor="ctr"/>
-          <a:lstStyle/>
-          <a:p>
-            <a:pPr algn="ctr"/>
-          </a:p>
-        </p:txBody>
-      </p:sp>
-      <p:sp>
-        <p:nvSpPr>
-          <p:cNvPr id="4" name="TextBox 3"/>
-          <p:cNvSpPr txBox="1"/>
-          <p:nvPr/>
-        </p:nvSpPr>
-        <p:spPr>
-          <a:xfrm>
-            <a:off x="502920" y="128016"/>
-            <a:ext cx="1371600" cy="365760"/>
-          </a:xfrm>
-          <a:prstGeom prst="rect">
-            <a:avLst/>
-          </a:prstGeom>
-          <a:noFill/>
-        </p:spPr>
-        <p:txBody>
-          <a:bodyPr wrap="square" anchor="t" lIns="0" rIns="0" tIns="0" bIns="0">
-            <a:spAutoFit/>
-          </a:bodyPr>
-          <a:lstStyle/>
-          <a:p>
-            <a:pPr algn="l">
-              <a:lnSpc>
-                <a:spcPct val="100000"/>
-              </a:lnSpc>
-            </a:pPr>
-            <a:r>
-              <a:rPr sz="1500" b="1" i="0">
-                <a:solidFill>
-                  <a:srgbClr val="4FB093"/>
-                </a:solidFill>
-                <a:latin typeface="Calibri"/>
-              </a:rPr>
-              <a:t>09</a:t>
-            </a:r>
-          </a:p>
-        </p:txBody>
-      </p:sp>
-      <p:sp>
-        <p:nvSpPr>
-          <p:cNvPr id="5" name="TextBox 4"/>
-          <p:cNvSpPr txBox="1"/>
-          <p:nvPr/>
-        </p:nvSpPr>
-        <p:spPr>
-          <a:xfrm>
-            <a:off x="502920" y="420624"/>
-            <a:ext cx="10515600" cy="594360"/>
-          </a:xfrm>
-          <a:prstGeom prst="rect">
-            <a:avLst/>
-          </a:prstGeom>
-          <a:noFill/>
-        </p:spPr>
-        <p:txBody>
-          <a:bodyPr wrap="square" anchor="t" lIns="0" rIns="0" tIns="0" bIns="0">
-            <a:spAutoFit/>
-          </a:bodyPr>
-          <a:lstStyle/>
-          <a:p>
-            <a:pPr algn="l">
-              <a:lnSpc>
-                <a:spcPct val="100000"/>
-              </a:lnSpc>
-            </a:pPr>
-            <a:r>
-              <a:rPr sz="2800" b="1" i="0">
-                <a:solidFill>
-                  <a:srgbClr val="FFFFFF"/>
-                </a:solidFill>
-                <a:latin typeface="Georgia"/>
-              </a:rPr>
-              <a:t>Prompts Sent to the LLM</a:t>
-            </a:r>
-          </a:p>
-        </p:txBody>
-      </p:sp>
-      <p:sp>
-        <p:nvSpPr>
-          <p:cNvPr id="6" name="TextBox 5"/>
-          <p:cNvSpPr txBox="1"/>
-          <p:nvPr/>
-        </p:nvSpPr>
-        <p:spPr>
-          <a:xfrm>
-            <a:off x="502920" y="1170432"/>
-            <a:ext cx="10972800" cy="365760"/>
-          </a:xfrm>
-          <a:prstGeom prst="rect">
-            <a:avLst/>
-          </a:prstGeom>
-          <a:noFill/>
-        </p:spPr>
-        <p:txBody>
-          <a:bodyPr wrap="square" anchor="t" lIns="0" rIns="0" tIns="0" bIns="0">
-            <a:spAutoFit/>
-          </a:bodyPr>
-          <a:lstStyle/>
-          <a:p>
-            <a:pPr algn="l">
-              <a:lnSpc>
-                <a:spcPct val="100000"/>
-              </a:lnSpc>
-            </a:pPr>
-            <a:r>
-              <a:rPr sz="1300" b="0" i="1">
-                <a:solidFill>
-                  <a:srgbClr val="5B665E"/>
-                </a:solidFill>
-                <a:latin typeface="Calibri"/>
-              </a:rPr>
-              <a:t>Representative prompts that actually drove each skill, pulled from the project's own session logs</a:t>
-            </a:r>
-          </a:p>
-        </p:txBody>
-      </p:sp>
-      <p:sp>
-        <p:nvSpPr>
-          <p:cNvPr id="7" name="TextBox 6"/>
-          <p:cNvSpPr txBox="1"/>
-          <p:nvPr/>
-        </p:nvSpPr>
-        <p:spPr>
-          <a:xfrm>
-            <a:off x="502920" y="6528816"/>
-            <a:ext cx="5486400" cy="274320"/>
-          </a:xfrm>
-          <a:prstGeom prst="rect">
-            <a:avLst/>
-          </a:prstGeom>
-          <a:noFill/>
-        </p:spPr>
-        <p:txBody>
-          <a:bodyPr wrap="square" anchor="t" lIns="0" rIns="0" tIns="0" bIns="0">
-            <a:spAutoFit/>
-          </a:bodyPr>
-          <a:lstStyle/>
-          <a:p>
-            <a:pPr algn="l">
-              <a:lnSpc>
-                <a:spcPct val="100000"/>
-              </a:lnSpc>
-            </a:pPr>
-            <a:r>
-              <a:rPr sz="900" b="0" i="0">
-                <a:solidFill>
-                  <a:srgbClr val="5B665E"/>
-                </a:solidFill>
-                <a:latin typeface="Calibri"/>
-              </a:rPr>
-              <a:t>TalentPilot-AI · SAILS Software Internal Pilot</a:t>
-            </a:r>
-          </a:p>
-        </p:txBody>
-      </p:sp>
-      <p:sp>
-        <p:nvSpPr>
-          <p:cNvPr id="8" name="Rounded Rectangle 7"/>
-          <p:cNvSpPr/>
-          <p:nvPr/>
-        </p:nvSpPr>
-        <p:spPr>
-          <a:xfrm>
-            <a:off x="502920" y="1600200"/>
-            <a:ext cx="11201400" cy="749808"/>
-          </a:xfrm>
-          <a:prstGeom prst="roundRect">
-            <a:avLst>
-              <a:gd name="adj" fmla="val 12000"/>
-            </a:avLst>
-          </a:prstGeom>
-          <a:solidFill>
-            <a:srgbClr val="F1ECDD"/>
-          </a:solidFill>
-          <a:ln w="12700">
-            <a:solidFill>
-              <a:srgbClr val="C99A3E"/>
-            </a:solidFill>
-          </a:ln>
-          <a:effectLst/>
-        </p:spPr>
-        <p:style>
-          <a:lnRef idx="1">
-            <a:schemeClr val="accent1"/>
-          </a:lnRef>
-          <a:fillRef idx="3">
-            <a:schemeClr val="accent1"/>
-          </a:fillRef>
-          <a:effectRef idx="2">
-            <a:schemeClr val="accent1"/>
-          </a:effectRef>
-          <a:fontRef idx="minor">
-            <a:schemeClr val="lt1"/>
-          </a:fontRef>
-        </p:style>
-        <p:txBody>
-          <a:bodyPr rtlCol="0" anchor="ctr"/>
-          <a:lstStyle/>
-          <a:p>
-            <a:pPr algn="ctr"/>
-          </a:p>
-        </p:txBody>
-      </p:sp>
-      <p:sp>
-        <p:nvSpPr>
-          <p:cNvPr id="9" name="TextBox 8"/>
-          <p:cNvSpPr txBox="1"/>
-          <p:nvPr/>
-        </p:nvSpPr>
-        <p:spPr>
-          <a:xfrm>
-            <a:off x="731520" y="1673352"/>
-            <a:ext cx="3246120" cy="548640"/>
-          </a:xfrm>
-          <a:prstGeom prst="rect">
-            <a:avLst/>
-          </a:prstGeom>
-          <a:noFill/>
-        </p:spPr>
-        <p:txBody>
-          <a:bodyPr wrap="square" anchor="t" lIns="0" rIns="0" tIns="0" bIns="0">
-            <a:spAutoFit/>
-          </a:bodyPr>
-          <a:lstStyle/>
-          <a:p>
-            <a:pPr algn="l">
-              <a:lnSpc>
-                <a:spcPct val="100000"/>
-              </a:lnSpc>
-            </a:pPr>
-            <a:r>
-              <a:rPr sz="1100" b="1" i="0">
-                <a:solidFill>
-                  <a:srgbClr val="123D30"/>
-                </a:solidFill>
-                <a:latin typeface="Consolas"/>
-              </a:rPr>
-              <a:t>/bmad-cis-agent-brainstorming-coach</a:t>
-            </a:r>
-          </a:p>
-        </p:txBody>
-      </p:sp>
-      <p:sp>
-        <p:nvSpPr>
-          <p:cNvPr id="10" name="TextBox 9"/>
-          <p:cNvSpPr txBox="1"/>
-          <p:nvPr/>
-        </p:nvSpPr>
-        <p:spPr>
-          <a:xfrm>
-            <a:off x="4069080" y="1673352"/>
-            <a:ext cx="7498079" cy="621792"/>
-          </a:xfrm>
-          <a:prstGeom prst="rect">
-            <a:avLst/>
-          </a:prstGeom>
-          <a:noFill/>
-        </p:spPr>
-        <p:txBody>
-          <a:bodyPr wrap="square" anchor="t" lIns="0" rIns="0" tIns="0" bIns="0">
-            <a:spAutoFit/>
-          </a:bodyPr>
-          <a:lstStyle/>
-          <a:p>
-            <a:pPr algn="l">
-              <a:lnSpc>
-                <a:spcPct val="105000"/>
-              </a:lnSpc>
-            </a:pPr>
-            <a:r>
-              <a:rPr sz="1050" b="0" i="1">
-                <a:solidFill>
-                  <a:srgbClr val="222A24"/>
-                </a:solidFill>
-                <a:latin typeface="Calibri"/>
-              </a:rPr>
-              <a:t>“Brainstorm Talent Pool Management capabilities — identify MVP and future-roadmap features: skills dashboard, learning progress tracking, automation replacing Excel, actionable dashboards for HR/employees, enterprise scalability.”</a:t>
-            </a:r>
-          </a:p>
-        </p:txBody>
-      </p:sp>
-      <p:sp>
-        <p:nvSpPr>
-          <p:cNvPr id="11" name="Rounded Rectangle 10"/>
-          <p:cNvSpPr/>
-          <p:nvPr/>
-        </p:nvSpPr>
-        <p:spPr>
-          <a:xfrm>
-            <a:off x="502920" y="2441448"/>
-            <a:ext cx="11201400" cy="749808"/>
-          </a:xfrm>
-          <a:prstGeom prst="roundRect">
-            <a:avLst>
-              <a:gd name="adj" fmla="val 12000"/>
-            </a:avLst>
-          </a:prstGeom>
-          <a:solidFill>
-            <a:srgbClr val="F1ECDD"/>
-          </a:solidFill>
-          <a:ln w="12700">
-            <a:solidFill>
-              <a:srgbClr val="C99A3E"/>
-            </a:solidFill>
-          </a:ln>
-          <a:effectLst/>
-        </p:spPr>
-        <p:style>
-          <a:lnRef idx="1">
-            <a:schemeClr val="accent1"/>
-          </a:lnRef>
-          <a:fillRef idx="3">
-            <a:schemeClr val="accent1"/>
-          </a:fillRef>
-          <a:effectRef idx="2">
-            <a:schemeClr val="accent1"/>
-          </a:effectRef>
-          <a:fontRef idx="minor">
-            <a:schemeClr val="lt1"/>
-          </a:fontRef>
-        </p:style>
-        <p:txBody>
-          <a:bodyPr rtlCol="0" anchor="ctr"/>
-          <a:lstStyle/>
-          <a:p>
-            <a:pPr algn="ctr"/>
-          </a:p>
-        </p:txBody>
-      </p:sp>
-      <p:sp>
-        <p:nvSpPr>
-          <p:cNvPr id="12" name="TextBox 11"/>
-          <p:cNvSpPr txBox="1"/>
-          <p:nvPr/>
-        </p:nvSpPr>
-        <p:spPr>
-          <a:xfrm>
-            <a:off x="731520" y="2514600"/>
-            <a:ext cx="3246120" cy="548640"/>
-          </a:xfrm>
-          <a:prstGeom prst="rect">
-            <a:avLst/>
-          </a:prstGeom>
-          <a:noFill/>
-        </p:spPr>
-        <p:txBody>
-          <a:bodyPr wrap="square" anchor="t" lIns="0" rIns="0" tIns="0" bIns="0">
-            <a:spAutoFit/>
-          </a:bodyPr>
-          <a:lstStyle/>
-          <a:p>
-            <a:pPr algn="l">
-              <a:lnSpc>
-                <a:spcPct val="100000"/>
-              </a:lnSpc>
-            </a:pPr>
-            <a:r>
-              <a:rPr sz="1100" b="1" i="0">
-                <a:solidFill>
-                  <a:srgbClr val="123D30"/>
-                </a:solidFill>
-                <a:latin typeface="Consolas"/>
-              </a:rPr>
-              <a:t>/bmad-market-research + /bmad-domain-research</a:t>
-            </a:r>
-          </a:p>
-        </p:txBody>
-      </p:sp>
-      <p:sp>
-        <p:nvSpPr>
-          <p:cNvPr id="13" name="TextBox 12"/>
-          <p:cNvSpPr txBox="1"/>
-          <p:nvPr/>
-        </p:nvSpPr>
-        <p:spPr>
-          <a:xfrm>
-            <a:off x="4069080" y="2514600"/>
-            <a:ext cx="7498079" cy="621792"/>
-          </a:xfrm>
-          <a:prstGeom prst="rect">
-            <a:avLst/>
-          </a:prstGeom>
-          <a:noFill/>
-        </p:spPr>
-        <p:txBody>
-          <a:bodyPr wrap="square" anchor="t" lIns="0" rIns="0" tIns="0" bIns="0">
-            <a:spAutoFit/>
-          </a:bodyPr>
-          <a:lstStyle/>
-          <a:p>
-            <a:pPr algn="l">
-              <a:lnSpc>
-                <a:spcPct val="105000"/>
-              </a:lnSpc>
-            </a:pPr>
-            <a:r>
-              <a:rPr sz="1050" b="0" i="1">
-                <a:solidFill>
-                  <a:srgbClr val="222A24"/>
-                </a:solidFill>
-                <a:latin typeface="Calibri"/>
-              </a:rPr>
-              <a:t>“Research the AI talent-pool-management platform market” and “research corporate skill-tracking / AI video-learning platforms” — run back-to-back to ground the brief in competitive + industry context.</a:t>
-            </a:r>
-          </a:p>
-        </p:txBody>
-      </p:sp>
-      <p:sp>
-        <p:nvSpPr>
-          <p:cNvPr id="14" name="Rounded Rectangle 13"/>
-          <p:cNvSpPr/>
-          <p:nvPr/>
-        </p:nvSpPr>
-        <p:spPr>
-          <a:xfrm>
-            <a:off x="502920" y="3282696"/>
-            <a:ext cx="11201400" cy="749808"/>
-          </a:xfrm>
-          <a:prstGeom prst="roundRect">
-            <a:avLst>
-              <a:gd name="adj" fmla="val 12000"/>
-            </a:avLst>
-          </a:prstGeom>
-          <a:solidFill>
-            <a:srgbClr val="F1ECDD"/>
-          </a:solidFill>
-          <a:ln w="12700">
-            <a:solidFill>
-              <a:srgbClr val="C99A3E"/>
-            </a:solidFill>
-          </a:ln>
-          <a:effectLst/>
-        </p:spPr>
-        <p:style>
-          <a:lnRef idx="1">
-            <a:schemeClr val="accent1"/>
-          </a:lnRef>
-          <a:fillRef idx="3">
-            <a:schemeClr val="accent1"/>
-          </a:fillRef>
-          <a:effectRef idx="2">
-            <a:schemeClr val="accent1"/>
-          </a:effectRef>
-          <a:fontRef idx="minor">
-            <a:schemeClr val="lt1"/>
-          </a:fontRef>
-        </p:style>
-        <p:txBody>
-          <a:bodyPr rtlCol="0" anchor="ctr"/>
-          <a:lstStyle/>
-          <a:p>
-            <a:pPr algn="ctr"/>
-          </a:p>
-        </p:txBody>
-      </p:sp>
-      <p:sp>
-        <p:nvSpPr>
-          <p:cNvPr id="15" name="TextBox 14"/>
-          <p:cNvSpPr txBox="1"/>
-          <p:nvPr/>
-        </p:nvSpPr>
-        <p:spPr>
-          <a:xfrm>
-            <a:off x="731520" y="3355848"/>
-            <a:ext cx="3246120" cy="548640"/>
-          </a:xfrm>
-          <a:prstGeom prst="rect">
-            <a:avLst/>
-          </a:prstGeom>
-          <a:noFill/>
-        </p:spPr>
-        <p:txBody>
-          <a:bodyPr wrap="square" anchor="t" lIns="0" rIns="0" tIns="0" bIns="0">
-            <a:spAutoFit/>
-          </a:bodyPr>
-          <a:lstStyle/>
-          <a:p>
-            <a:pPr algn="l">
-              <a:lnSpc>
-                <a:spcPct val="100000"/>
-              </a:lnSpc>
-            </a:pPr>
-            <a:r>
-              <a:rPr sz="1100" b="1" i="0">
-                <a:solidFill>
-                  <a:srgbClr val="123D30"/>
-                </a:solidFill>
-                <a:latin typeface="Consolas"/>
-              </a:rPr>
-              <a:t>/bmad-prd</a:t>
-            </a:r>
-          </a:p>
-        </p:txBody>
-      </p:sp>
-      <p:sp>
-        <p:nvSpPr>
-          <p:cNvPr id="16" name="TextBox 15"/>
-          <p:cNvSpPr txBox="1"/>
-          <p:nvPr/>
-        </p:nvSpPr>
-        <p:spPr>
-          <a:xfrm>
-            <a:off x="4069080" y="3355848"/>
-            <a:ext cx="7498079" cy="621792"/>
-          </a:xfrm>
-          <a:prstGeom prst="rect">
-            <a:avLst/>
-          </a:prstGeom>
-          <a:noFill/>
-        </p:spPr>
-        <p:txBody>
-          <a:bodyPr wrap="square" anchor="t" lIns="0" rIns="0" tIns="0" bIns="0">
-            <a:spAutoFit/>
-          </a:bodyPr>
-          <a:lstStyle/>
-          <a:p>
-            <a:pPr algn="l">
-              <a:lnSpc>
-                <a:spcPct val="105000"/>
-              </a:lnSpc>
-            </a:pPr>
-            <a:r>
-              <a:rPr sz="1050" b="0" i="1">
-                <a:solidFill>
-                  <a:srgbClr val="222A24"/>
-                </a:solidFill>
-                <a:latin typeface="Calibri"/>
-              </a:rPr>
-              <a:t>“Draft the PRD from the full existing artifact set — product brief, trigger map, UX scenarios, prototypes, research, PRFAQ — fast path, tag unvalidated inferences as [ASSUMPTION].”</a:t>
-            </a:r>
-          </a:p>
-        </p:txBody>
-      </p:sp>
-      <p:sp>
-        <p:nvSpPr>
-          <p:cNvPr id="17" name="Rounded Rectangle 16"/>
-          <p:cNvSpPr/>
-          <p:nvPr/>
-        </p:nvSpPr>
-        <p:spPr>
-          <a:xfrm>
-            <a:off x="502920" y="4123944"/>
-            <a:ext cx="11201400" cy="749808"/>
-          </a:xfrm>
-          <a:prstGeom prst="roundRect">
-            <a:avLst>
-              <a:gd name="adj" fmla="val 12000"/>
-            </a:avLst>
-          </a:prstGeom>
-          <a:solidFill>
-            <a:srgbClr val="F1ECDD"/>
-          </a:solidFill>
-          <a:ln w="12700">
-            <a:solidFill>
-              <a:srgbClr val="C99A3E"/>
-            </a:solidFill>
-          </a:ln>
-          <a:effectLst/>
-        </p:spPr>
-        <p:style>
-          <a:lnRef idx="1">
-            <a:schemeClr val="accent1"/>
-          </a:lnRef>
-          <a:fillRef idx="3">
-            <a:schemeClr val="accent1"/>
-          </a:fillRef>
-          <a:effectRef idx="2">
-            <a:schemeClr val="accent1"/>
-          </a:effectRef>
-          <a:fontRef idx="minor">
-            <a:schemeClr val="lt1"/>
-          </a:fontRef>
-        </p:style>
-        <p:txBody>
-          <a:bodyPr rtlCol="0" anchor="ctr"/>
-          <a:lstStyle/>
-          <a:p>
-            <a:pPr algn="ctr"/>
-          </a:p>
-        </p:txBody>
-      </p:sp>
-      <p:sp>
-        <p:nvSpPr>
-          <p:cNvPr id="18" name="TextBox 17"/>
-          <p:cNvSpPr txBox="1"/>
-          <p:nvPr/>
-        </p:nvSpPr>
-        <p:spPr>
-          <a:xfrm>
-            <a:off x="731520" y="4197096"/>
-            <a:ext cx="3246120" cy="548640"/>
-          </a:xfrm>
-          <a:prstGeom prst="rect">
-            <a:avLst/>
-          </a:prstGeom>
-          <a:noFill/>
-        </p:spPr>
-        <p:txBody>
-          <a:bodyPr wrap="square" anchor="t" lIns="0" rIns="0" tIns="0" bIns="0">
-            <a:spAutoFit/>
-          </a:bodyPr>
-          <a:lstStyle/>
-          <a:p>
-            <a:pPr algn="l">
-              <a:lnSpc>
-                <a:spcPct val="100000"/>
-              </a:lnSpc>
-            </a:pPr>
-            <a:r>
-              <a:rPr sz="1100" b="1" i="0">
-                <a:solidFill>
-                  <a:srgbClr val="123D30"/>
-                </a:solidFill>
-                <a:latin typeface="Consolas"/>
-              </a:rPr>
-              <a:t>/bmad-agent-architect</a:t>
-            </a:r>
-          </a:p>
-        </p:txBody>
-      </p:sp>
-      <p:sp>
-        <p:nvSpPr>
-          <p:cNvPr id="19" name="TextBox 18"/>
-          <p:cNvSpPr txBox="1"/>
-          <p:nvPr/>
-        </p:nvSpPr>
-        <p:spPr>
-          <a:xfrm>
-            <a:off x="4069080" y="4197096"/>
-            <a:ext cx="7498079" cy="621792"/>
-          </a:xfrm>
-          <a:prstGeom prst="rect">
-            <a:avLst/>
-          </a:prstGeom>
-          <a:noFill/>
-        </p:spPr>
-        <p:txBody>
-          <a:bodyPr wrap="square" anchor="t" lIns="0" rIns="0" tIns="0" bIns="0">
-            <a:spAutoFit/>
-          </a:bodyPr>
-          <a:lstStyle/>
-          <a:p>
-            <a:pPr algn="l">
-              <a:lnSpc>
-                <a:spcPct val="105000"/>
-              </a:lnSpc>
-            </a:pPr>
-            <a:r>
-              <a:rPr sz="1050" b="0" i="1">
-                <a:solidFill>
-                  <a:srgbClr val="222A24"/>
-                </a:solidFill>
-                <a:latin typeface="Calibri"/>
-              </a:rPr>
-              <a:t>“Produce the Architecture Spine and Solution Design for TalentPilot-AI as a modular monolith — React SPA, FastAPI, PostgreSQL+pgvector — zero paid infrastructure, local Docker only.”</a:t>
-            </a:r>
-          </a:p>
-        </p:txBody>
-      </p:sp>
-      <p:sp>
-        <p:nvSpPr>
-          <p:cNvPr id="20" name="Rounded Rectangle 19"/>
-          <p:cNvSpPr/>
-          <p:nvPr/>
-        </p:nvSpPr>
-        <p:spPr>
-          <a:xfrm>
-            <a:off x="502920" y="4965192"/>
-            <a:ext cx="11201400" cy="749808"/>
-          </a:xfrm>
-          <a:prstGeom prst="roundRect">
-            <a:avLst>
-              <a:gd name="adj" fmla="val 12000"/>
-            </a:avLst>
-          </a:prstGeom>
-          <a:solidFill>
-            <a:srgbClr val="F1ECDD"/>
-          </a:solidFill>
-          <a:ln w="12700">
-            <a:solidFill>
-              <a:srgbClr val="C99A3E"/>
-            </a:solidFill>
-          </a:ln>
-          <a:effectLst/>
-        </p:spPr>
-        <p:style>
-          <a:lnRef idx="1">
-            <a:schemeClr val="accent1"/>
-          </a:lnRef>
-          <a:fillRef idx="3">
-            <a:schemeClr val="accent1"/>
-          </a:fillRef>
-          <a:effectRef idx="2">
-            <a:schemeClr val="accent1"/>
-          </a:effectRef>
-          <a:fontRef idx="minor">
-            <a:schemeClr val="lt1"/>
-          </a:fontRef>
-        </p:style>
-        <p:txBody>
-          <a:bodyPr rtlCol="0" anchor="ctr"/>
-          <a:lstStyle/>
-          <a:p>
-            <a:pPr algn="ctr"/>
-          </a:p>
-        </p:txBody>
-      </p:sp>
-      <p:sp>
-        <p:nvSpPr>
-          <p:cNvPr id="21" name="TextBox 20"/>
-          <p:cNvSpPr txBox="1"/>
-          <p:nvPr/>
-        </p:nvSpPr>
-        <p:spPr>
-          <a:xfrm>
-            <a:off x="731520" y="5038344"/>
-            <a:ext cx="3246120" cy="548640"/>
-          </a:xfrm>
-          <a:prstGeom prst="rect">
-            <a:avLst/>
-          </a:prstGeom>
-          <a:noFill/>
-        </p:spPr>
-        <p:txBody>
-          <a:bodyPr wrap="square" anchor="t" lIns="0" rIns="0" tIns="0" bIns="0">
-            <a:spAutoFit/>
-          </a:bodyPr>
-          <a:lstStyle/>
-          <a:p>
-            <a:pPr algn="l">
-              <a:lnSpc>
-                <a:spcPct val="100000"/>
-              </a:lnSpc>
-            </a:pPr>
-            <a:r>
-              <a:rPr sz="1100" b="1" i="0">
-                <a:solidFill>
-                  <a:srgbClr val="123D30"/>
-                </a:solidFill>
-                <a:latin typeface="Consolas"/>
-              </a:rPr>
-              <a:t>/bmad-check-implementation-readiness</a:t>
-            </a:r>
-          </a:p>
-        </p:txBody>
-      </p:sp>
-      <p:sp>
-        <p:nvSpPr>
-          <p:cNvPr id="22" name="TextBox 21"/>
-          <p:cNvSpPr txBox="1"/>
-          <p:nvPr/>
-        </p:nvSpPr>
-        <p:spPr>
-          <a:xfrm>
-            <a:off x="4069080" y="5038344"/>
-            <a:ext cx="7498079" cy="621792"/>
-          </a:xfrm>
-          <a:prstGeom prst="rect">
-            <a:avLst/>
-          </a:prstGeom>
-          <a:noFill/>
-        </p:spPr>
-        <p:txBody>
-          <a:bodyPr wrap="square" anchor="t" lIns="0" rIns="0" tIns="0" bIns="0">
-            <a:spAutoFit/>
-          </a:bodyPr>
-          <a:lstStyle/>
-          <a:p>
-            <a:pPr algn="l">
-              <a:lnSpc>
-                <a:spcPct val="105000"/>
-              </a:lnSpc>
-            </a:pPr>
-            <a:r>
-              <a:rPr sz="1050" b="0" i="1">
-                <a:solidFill>
-                  <a:srgbClr val="222A24"/>
-                </a:solidFill>
-                <a:latin typeface="Calibri"/>
-              </a:rPr>
-              <a:t>“Check implementation readiness” — validate PRD, UX, Architecture, and Epics are complete and internally consistent before any story work begins.</a:t>
-            </a:r>
-          </a:p>
-        </p:txBody>
-      </p:sp>
-      <p:sp>
-        <p:nvSpPr>
-          <p:cNvPr id="23" name="Rounded Rectangle 22"/>
-          <p:cNvSpPr/>
-          <p:nvPr/>
-        </p:nvSpPr>
-        <p:spPr>
-          <a:xfrm>
-            <a:off x="502920" y="5806440"/>
-            <a:ext cx="11201400" cy="749808"/>
-          </a:xfrm>
-          <a:prstGeom prst="roundRect">
-            <a:avLst>
-              <a:gd name="adj" fmla="val 12000"/>
-            </a:avLst>
-          </a:prstGeom>
-          <a:solidFill>
-            <a:srgbClr val="F1ECDD"/>
-          </a:solidFill>
-          <a:ln w="12700">
-            <a:solidFill>
-              <a:srgbClr val="C99A3E"/>
-            </a:solidFill>
-          </a:ln>
-          <a:effectLst/>
-        </p:spPr>
-        <p:style>
-          <a:lnRef idx="1">
-            <a:schemeClr val="accent1"/>
-          </a:lnRef>
-          <a:fillRef idx="3">
-            <a:schemeClr val="accent1"/>
-          </a:fillRef>
-          <a:effectRef idx="2">
-            <a:schemeClr val="accent1"/>
-          </a:effectRef>
-          <a:fontRef idx="minor">
-            <a:schemeClr val="lt1"/>
-          </a:fontRef>
-        </p:style>
-        <p:txBody>
-          <a:bodyPr rtlCol="0" anchor="ctr"/>
-          <a:lstStyle/>
-          <a:p>
-            <a:pPr algn="ctr"/>
-          </a:p>
-        </p:txBody>
-      </p:sp>
-      <p:sp>
-        <p:nvSpPr>
-          <p:cNvPr id="24" name="TextBox 23"/>
-          <p:cNvSpPr txBox="1"/>
-          <p:nvPr/>
-        </p:nvSpPr>
-        <p:spPr>
-          <a:xfrm>
-            <a:off x="731520" y="5879592"/>
-            <a:ext cx="3246120" cy="548640"/>
-          </a:xfrm>
-          <a:prstGeom prst="rect">
-            <a:avLst/>
-          </a:prstGeom>
-          <a:noFill/>
-        </p:spPr>
-        <p:txBody>
-          <a:bodyPr wrap="square" anchor="t" lIns="0" rIns="0" tIns="0" bIns="0">
-            <a:spAutoFit/>
-          </a:bodyPr>
-          <a:lstStyle/>
-          <a:p>
-            <a:pPr algn="l">
-              <a:lnSpc>
-                <a:spcPct val="100000"/>
-              </a:lnSpc>
-            </a:pPr>
-            <a:r>
-              <a:rPr sz="1100" b="1" i="0">
-                <a:solidFill>
-                  <a:srgbClr val="123D30"/>
-                </a:solidFill>
-                <a:latin typeface="Consolas"/>
-              </a:rPr>
-              <a:t>/bmad-sprint-planning</a:t>
-            </a:r>
-          </a:p>
-        </p:txBody>
-      </p:sp>
-      <p:sp>
-        <p:nvSpPr>
-          <p:cNvPr id="25" name="TextBox 24"/>
-          <p:cNvSpPr txBox="1"/>
-          <p:nvPr/>
-        </p:nvSpPr>
-        <p:spPr>
-          <a:xfrm>
-            <a:off x="4069080" y="5879592"/>
-            <a:ext cx="7498079" cy="621792"/>
-          </a:xfrm>
-          <a:prstGeom prst="rect">
-            <a:avLst/>
-          </a:prstGeom>
-          <a:noFill/>
-        </p:spPr>
-        <p:txBody>
-          <a:bodyPr wrap="square" anchor="t" lIns="0" rIns="0" tIns="0" bIns="0">
-            <a:spAutoFit/>
-          </a:bodyPr>
-          <a:lstStyle/>
-          <a:p>
-            <a:pPr algn="l">
-              <a:lnSpc>
-                <a:spcPct val="105000"/>
-              </a:lnSpc>
-            </a:pPr>
-            <a:r>
-              <a:rPr sz="1050" b="0" i="1">
-                <a:solidFill>
-                  <a:srgbClr val="222A24"/>
-                </a:solidFill>
-                <a:latin typeface="Calibri"/>
-              </a:rPr>
-              <a:t>“Run sprint planning” — generate sprint-status.yaml tracking from the finalized epics.md so dev work can be sequenced.</a:t>
-            </a:r>
-          </a:p>
-        </p:txBody>
-      </p:sp>
-      <p:sp>
-        <p:nvSpPr>
-          <p:cNvPr id="26" name="TextBox 25"/>
-          <p:cNvSpPr txBox="1"/>
-          <p:nvPr/>
-        </p:nvSpPr>
-        <p:spPr>
-          <a:xfrm>
-            <a:off x="502920" y="6400800"/>
-            <a:ext cx="11155680" cy="320040"/>
-          </a:xfrm>
-          <a:prstGeom prst="rect">
-            <a:avLst/>
-          </a:prstGeom>
-          <a:noFill/>
-        </p:spPr>
-        <p:txBody>
-          <a:bodyPr wrap="square" anchor="t" lIns="0" rIns="0" tIns="0" bIns="0">
-            <a:spAutoFit/>
-          </a:bodyPr>
-          <a:lstStyle/>
-          <a:p>
-            <a:pPr algn="l">
-              <a:lnSpc>
-                <a:spcPct val="100000"/>
-              </a:lnSpc>
-            </a:pPr>
-            <a:r>
-              <a:rPr sz="950" b="0" i="1">
-                <a:solidFill>
-                  <a:srgbClr val="5B665E"/>
-                </a:solidFill>
-                <a:latin typeface="Calibri"/>
-              </a:rPr>
-              <a:t>Source: .memlog.md session logs under _bmad-output/ — each skill append-logs its own driving decisions and inputs as it runs.</a:t>
-            </a:r>
-          </a:p>
-        </p:txBody>
-      </p:sp>
-    </p:spTree>
-  </p:cSld>
-  <p:clrMapOvr>
-    <a:masterClrMapping/>
-  </p:clrMapOvr>
-</p:sld>
-</file>
-
 <file path=ppt/slides/slide12.xml><?xml version="1.0" encoding="utf-8"?>
 <p:sld xmlns:a="http://schemas.openxmlformats.org/drawingml/2006/main" xmlns:p="http://schemas.openxmlformats.org/presentationml/2006/main" xmlns:r="http://schemas.openxmlformats.org/officeDocument/2006/relationships">
   <p:cSld>
@@ -6019,6 +6071,1078 @@
                 <a:latin typeface="Calibri"/>
               </a:rPr>
               <a:t>10</a:t>
+            </a:r>
+          </a:p>
+        </p:txBody>
+      </p:sp>
+      <p:sp>
+        <p:nvSpPr>
+          <p:cNvPr id="5" name="TextBox 4"/>
+          <p:cNvSpPr txBox="1"/>
+          <p:nvPr/>
+        </p:nvSpPr>
+        <p:spPr>
+          <a:xfrm>
+            <a:off x="502920" y="420624"/>
+            <a:ext cx="10515600" cy="594360"/>
+          </a:xfrm>
+          <a:prstGeom prst="rect">
+            <a:avLst/>
+          </a:prstGeom>
+          <a:noFill/>
+        </p:spPr>
+        <p:txBody>
+          <a:bodyPr wrap="square" anchor="t" lIns="0" rIns="0" tIns="0" bIns="0">
+            <a:spAutoFit/>
+          </a:bodyPr>
+          <a:lstStyle/>
+          <a:p>
+            <a:pPr algn="l">
+              <a:lnSpc>
+                <a:spcPct val="100000"/>
+              </a:lnSpc>
+            </a:pPr>
+            <a:r>
+              <a:rPr sz="2800" b="1" i="0">
+                <a:solidFill>
+                  <a:srgbClr val="FFFFFF"/>
+                </a:solidFill>
+                <a:latin typeface="Georgia"/>
+              </a:rPr>
+              <a:t>Prompts Sent to the LLM</a:t>
+            </a:r>
+          </a:p>
+        </p:txBody>
+      </p:sp>
+      <p:sp>
+        <p:nvSpPr>
+          <p:cNvPr id="6" name="TextBox 5"/>
+          <p:cNvSpPr txBox="1"/>
+          <p:nvPr/>
+        </p:nvSpPr>
+        <p:spPr>
+          <a:xfrm>
+            <a:off x="502920" y="1170432"/>
+            <a:ext cx="10972800" cy="365760"/>
+          </a:xfrm>
+          <a:prstGeom prst="rect">
+            <a:avLst/>
+          </a:prstGeom>
+          <a:noFill/>
+        </p:spPr>
+        <p:txBody>
+          <a:bodyPr wrap="square" anchor="t" lIns="0" rIns="0" tIns="0" bIns="0">
+            <a:spAutoFit/>
+          </a:bodyPr>
+          <a:lstStyle/>
+          <a:p>
+            <a:pPr algn="l">
+              <a:lnSpc>
+                <a:spcPct val="100000"/>
+              </a:lnSpc>
+            </a:pPr>
+            <a:r>
+              <a:rPr sz="1300" b="0" i="1">
+                <a:solidFill>
+                  <a:srgbClr val="5B665E"/>
+                </a:solidFill>
+                <a:latin typeface="Calibri"/>
+              </a:rPr>
+              <a:t>Representative prompts that actually drove each skill, pulled from the project's own session logs</a:t>
+            </a:r>
+          </a:p>
+        </p:txBody>
+      </p:sp>
+      <p:sp>
+        <p:nvSpPr>
+          <p:cNvPr id="7" name="TextBox 6"/>
+          <p:cNvSpPr txBox="1"/>
+          <p:nvPr/>
+        </p:nvSpPr>
+        <p:spPr>
+          <a:xfrm>
+            <a:off x="502920" y="6528816"/>
+            <a:ext cx="5486400" cy="274320"/>
+          </a:xfrm>
+          <a:prstGeom prst="rect">
+            <a:avLst/>
+          </a:prstGeom>
+          <a:noFill/>
+        </p:spPr>
+        <p:txBody>
+          <a:bodyPr wrap="square" anchor="t" lIns="0" rIns="0" tIns="0" bIns="0">
+            <a:spAutoFit/>
+          </a:bodyPr>
+          <a:lstStyle/>
+          <a:p>
+            <a:pPr algn="l">
+              <a:lnSpc>
+                <a:spcPct val="100000"/>
+              </a:lnSpc>
+            </a:pPr>
+            <a:r>
+              <a:rPr sz="900" b="0" i="0">
+                <a:solidFill>
+                  <a:srgbClr val="5B665E"/>
+                </a:solidFill>
+                <a:latin typeface="Calibri"/>
+              </a:rPr>
+              <a:t>TalentPilot-AI · SAILS Software Internal Pilot</a:t>
+            </a:r>
+          </a:p>
+        </p:txBody>
+      </p:sp>
+      <p:sp>
+        <p:nvSpPr>
+          <p:cNvPr id="8" name="Rounded Rectangle 7"/>
+          <p:cNvSpPr/>
+          <p:nvPr/>
+        </p:nvSpPr>
+        <p:spPr>
+          <a:xfrm>
+            <a:off x="502920" y="1600200"/>
+            <a:ext cx="11201400" cy="749808"/>
+          </a:xfrm>
+          <a:prstGeom prst="roundRect">
+            <a:avLst>
+              <a:gd name="adj" fmla="val 12000"/>
+            </a:avLst>
+          </a:prstGeom>
+          <a:solidFill>
+            <a:srgbClr val="F1ECDD"/>
+          </a:solidFill>
+          <a:ln w="12700">
+            <a:solidFill>
+              <a:srgbClr val="C99A3E"/>
+            </a:solidFill>
+          </a:ln>
+          <a:effectLst/>
+        </p:spPr>
+        <p:style>
+          <a:lnRef idx="1">
+            <a:schemeClr val="accent1"/>
+          </a:lnRef>
+          <a:fillRef idx="3">
+            <a:schemeClr val="accent1"/>
+          </a:fillRef>
+          <a:effectRef idx="2">
+            <a:schemeClr val="accent1"/>
+          </a:effectRef>
+          <a:fontRef idx="minor">
+            <a:schemeClr val="lt1"/>
+          </a:fontRef>
+        </p:style>
+        <p:txBody>
+          <a:bodyPr rtlCol="0" anchor="ctr"/>
+          <a:lstStyle/>
+          <a:p>
+            <a:pPr algn="ctr"/>
+          </a:p>
+        </p:txBody>
+      </p:sp>
+      <p:sp>
+        <p:nvSpPr>
+          <p:cNvPr id="9" name="TextBox 8"/>
+          <p:cNvSpPr txBox="1"/>
+          <p:nvPr/>
+        </p:nvSpPr>
+        <p:spPr>
+          <a:xfrm>
+            <a:off x="731520" y="1673352"/>
+            <a:ext cx="3246120" cy="548640"/>
+          </a:xfrm>
+          <a:prstGeom prst="rect">
+            <a:avLst/>
+          </a:prstGeom>
+          <a:noFill/>
+        </p:spPr>
+        <p:txBody>
+          <a:bodyPr wrap="square" anchor="t" lIns="0" rIns="0" tIns="0" bIns="0">
+            <a:spAutoFit/>
+          </a:bodyPr>
+          <a:lstStyle/>
+          <a:p>
+            <a:pPr algn="l">
+              <a:lnSpc>
+                <a:spcPct val="100000"/>
+              </a:lnSpc>
+            </a:pPr>
+            <a:r>
+              <a:rPr sz="1100" b="1" i="0">
+                <a:solidFill>
+                  <a:srgbClr val="123D30"/>
+                </a:solidFill>
+                <a:latin typeface="Consolas"/>
+              </a:rPr>
+              <a:t>/bmad-cis-agent-brainstorming-coach</a:t>
+            </a:r>
+          </a:p>
+        </p:txBody>
+      </p:sp>
+      <p:sp>
+        <p:nvSpPr>
+          <p:cNvPr id="10" name="TextBox 9"/>
+          <p:cNvSpPr txBox="1"/>
+          <p:nvPr/>
+        </p:nvSpPr>
+        <p:spPr>
+          <a:xfrm>
+            <a:off x="4069080" y="1673352"/>
+            <a:ext cx="7498079" cy="621792"/>
+          </a:xfrm>
+          <a:prstGeom prst="rect">
+            <a:avLst/>
+          </a:prstGeom>
+          <a:noFill/>
+        </p:spPr>
+        <p:txBody>
+          <a:bodyPr wrap="square" anchor="t" lIns="0" rIns="0" tIns="0" bIns="0">
+            <a:spAutoFit/>
+          </a:bodyPr>
+          <a:lstStyle/>
+          <a:p>
+            <a:pPr algn="l">
+              <a:lnSpc>
+                <a:spcPct val="105000"/>
+              </a:lnSpc>
+            </a:pPr>
+            <a:r>
+              <a:rPr sz="1050" b="0" i="1">
+                <a:solidFill>
+                  <a:srgbClr val="222A24"/>
+                </a:solidFill>
+                <a:latin typeface="Calibri"/>
+              </a:rPr>
+              <a:t>“Brainstorm Talent Pool Management capabilities — identify MVP and future-roadmap features: skills dashboard, learning progress tracking, automation replacing Excel, actionable dashboards for HR/employees, enterprise scalability.”</a:t>
+            </a:r>
+          </a:p>
+        </p:txBody>
+      </p:sp>
+      <p:sp>
+        <p:nvSpPr>
+          <p:cNvPr id="11" name="Rounded Rectangle 10"/>
+          <p:cNvSpPr/>
+          <p:nvPr/>
+        </p:nvSpPr>
+        <p:spPr>
+          <a:xfrm>
+            <a:off x="502920" y="2441448"/>
+            <a:ext cx="11201400" cy="749808"/>
+          </a:xfrm>
+          <a:prstGeom prst="roundRect">
+            <a:avLst>
+              <a:gd name="adj" fmla="val 12000"/>
+            </a:avLst>
+          </a:prstGeom>
+          <a:solidFill>
+            <a:srgbClr val="F1ECDD"/>
+          </a:solidFill>
+          <a:ln w="12700">
+            <a:solidFill>
+              <a:srgbClr val="C99A3E"/>
+            </a:solidFill>
+          </a:ln>
+          <a:effectLst/>
+        </p:spPr>
+        <p:style>
+          <a:lnRef idx="1">
+            <a:schemeClr val="accent1"/>
+          </a:lnRef>
+          <a:fillRef idx="3">
+            <a:schemeClr val="accent1"/>
+          </a:fillRef>
+          <a:effectRef idx="2">
+            <a:schemeClr val="accent1"/>
+          </a:effectRef>
+          <a:fontRef idx="minor">
+            <a:schemeClr val="lt1"/>
+          </a:fontRef>
+        </p:style>
+        <p:txBody>
+          <a:bodyPr rtlCol="0" anchor="ctr"/>
+          <a:lstStyle/>
+          <a:p>
+            <a:pPr algn="ctr"/>
+          </a:p>
+        </p:txBody>
+      </p:sp>
+      <p:sp>
+        <p:nvSpPr>
+          <p:cNvPr id="12" name="TextBox 11"/>
+          <p:cNvSpPr txBox="1"/>
+          <p:nvPr/>
+        </p:nvSpPr>
+        <p:spPr>
+          <a:xfrm>
+            <a:off x="731520" y="2514600"/>
+            <a:ext cx="3246120" cy="548640"/>
+          </a:xfrm>
+          <a:prstGeom prst="rect">
+            <a:avLst/>
+          </a:prstGeom>
+          <a:noFill/>
+        </p:spPr>
+        <p:txBody>
+          <a:bodyPr wrap="square" anchor="t" lIns="0" rIns="0" tIns="0" bIns="0">
+            <a:spAutoFit/>
+          </a:bodyPr>
+          <a:lstStyle/>
+          <a:p>
+            <a:pPr algn="l">
+              <a:lnSpc>
+                <a:spcPct val="100000"/>
+              </a:lnSpc>
+            </a:pPr>
+            <a:r>
+              <a:rPr sz="1100" b="1" i="0">
+                <a:solidFill>
+                  <a:srgbClr val="123D30"/>
+                </a:solidFill>
+                <a:latin typeface="Consolas"/>
+              </a:rPr>
+              <a:t>/bmad-market-research + /bmad-domain-research</a:t>
+            </a:r>
+          </a:p>
+        </p:txBody>
+      </p:sp>
+      <p:sp>
+        <p:nvSpPr>
+          <p:cNvPr id="13" name="TextBox 12"/>
+          <p:cNvSpPr txBox="1"/>
+          <p:nvPr/>
+        </p:nvSpPr>
+        <p:spPr>
+          <a:xfrm>
+            <a:off x="4069080" y="2514600"/>
+            <a:ext cx="7498079" cy="621792"/>
+          </a:xfrm>
+          <a:prstGeom prst="rect">
+            <a:avLst/>
+          </a:prstGeom>
+          <a:noFill/>
+        </p:spPr>
+        <p:txBody>
+          <a:bodyPr wrap="square" anchor="t" lIns="0" rIns="0" tIns="0" bIns="0">
+            <a:spAutoFit/>
+          </a:bodyPr>
+          <a:lstStyle/>
+          <a:p>
+            <a:pPr algn="l">
+              <a:lnSpc>
+                <a:spcPct val="105000"/>
+              </a:lnSpc>
+            </a:pPr>
+            <a:r>
+              <a:rPr sz="1050" b="0" i="1">
+                <a:solidFill>
+                  <a:srgbClr val="222A24"/>
+                </a:solidFill>
+                <a:latin typeface="Calibri"/>
+              </a:rPr>
+              <a:t>“Research the AI talent-pool-management platform market” and “research corporate skill-tracking / AI video-learning platforms” — run back-to-back to ground the brief in competitive + industry context.</a:t>
+            </a:r>
+          </a:p>
+        </p:txBody>
+      </p:sp>
+      <p:sp>
+        <p:nvSpPr>
+          <p:cNvPr id="14" name="Rounded Rectangle 13"/>
+          <p:cNvSpPr/>
+          <p:nvPr/>
+        </p:nvSpPr>
+        <p:spPr>
+          <a:xfrm>
+            <a:off x="502920" y="3282696"/>
+            <a:ext cx="11201400" cy="749808"/>
+          </a:xfrm>
+          <a:prstGeom prst="roundRect">
+            <a:avLst>
+              <a:gd name="adj" fmla="val 12000"/>
+            </a:avLst>
+          </a:prstGeom>
+          <a:solidFill>
+            <a:srgbClr val="F1ECDD"/>
+          </a:solidFill>
+          <a:ln w="12700">
+            <a:solidFill>
+              <a:srgbClr val="C99A3E"/>
+            </a:solidFill>
+          </a:ln>
+          <a:effectLst/>
+        </p:spPr>
+        <p:style>
+          <a:lnRef idx="1">
+            <a:schemeClr val="accent1"/>
+          </a:lnRef>
+          <a:fillRef idx="3">
+            <a:schemeClr val="accent1"/>
+          </a:fillRef>
+          <a:effectRef idx="2">
+            <a:schemeClr val="accent1"/>
+          </a:effectRef>
+          <a:fontRef idx="minor">
+            <a:schemeClr val="lt1"/>
+          </a:fontRef>
+        </p:style>
+        <p:txBody>
+          <a:bodyPr rtlCol="0" anchor="ctr"/>
+          <a:lstStyle/>
+          <a:p>
+            <a:pPr algn="ctr"/>
+          </a:p>
+        </p:txBody>
+      </p:sp>
+      <p:sp>
+        <p:nvSpPr>
+          <p:cNvPr id="15" name="TextBox 14"/>
+          <p:cNvSpPr txBox="1"/>
+          <p:nvPr/>
+        </p:nvSpPr>
+        <p:spPr>
+          <a:xfrm>
+            <a:off x="731520" y="3355848"/>
+            <a:ext cx="3246120" cy="548640"/>
+          </a:xfrm>
+          <a:prstGeom prst="rect">
+            <a:avLst/>
+          </a:prstGeom>
+          <a:noFill/>
+        </p:spPr>
+        <p:txBody>
+          <a:bodyPr wrap="square" anchor="t" lIns="0" rIns="0" tIns="0" bIns="0">
+            <a:spAutoFit/>
+          </a:bodyPr>
+          <a:lstStyle/>
+          <a:p>
+            <a:pPr algn="l">
+              <a:lnSpc>
+                <a:spcPct val="100000"/>
+              </a:lnSpc>
+            </a:pPr>
+            <a:r>
+              <a:rPr sz="1100" b="1" i="0">
+                <a:solidFill>
+                  <a:srgbClr val="123D30"/>
+                </a:solidFill>
+                <a:latin typeface="Consolas"/>
+              </a:rPr>
+              <a:t>/bmad-prd</a:t>
+            </a:r>
+          </a:p>
+        </p:txBody>
+      </p:sp>
+      <p:sp>
+        <p:nvSpPr>
+          <p:cNvPr id="16" name="TextBox 15"/>
+          <p:cNvSpPr txBox="1"/>
+          <p:nvPr/>
+        </p:nvSpPr>
+        <p:spPr>
+          <a:xfrm>
+            <a:off x="4069080" y="3355848"/>
+            <a:ext cx="7498079" cy="621792"/>
+          </a:xfrm>
+          <a:prstGeom prst="rect">
+            <a:avLst/>
+          </a:prstGeom>
+          <a:noFill/>
+        </p:spPr>
+        <p:txBody>
+          <a:bodyPr wrap="square" anchor="t" lIns="0" rIns="0" tIns="0" bIns="0">
+            <a:spAutoFit/>
+          </a:bodyPr>
+          <a:lstStyle/>
+          <a:p>
+            <a:pPr algn="l">
+              <a:lnSpc>
+                <a:spcPct val="105000"/>
+              </a:lnSpc>
+            </a:pPr>
+            <a:r>
+              <a:rPr sz="1050" b="0" i="1">
+                <a:solidFill>
+                  <a:srgbClr val="222A24"/>
+                </a:solidFill>
+                <a:latin typeface="Calibri"/>
+              </a:rPr>
+              <a:t>“Draft the PRD from the full existing artifact set — product brief, trigger map, UX scenarios, prototypes, research, PRFAQ — fast path, tag unvalidated inferences as [ASSUMPTION].”</a:t>
+            </a:r>
+          </a:p>
+        </p:txBody>
+      </p:sp>
+      <p:sp>
+        <p:nvSpPr>
+          <p:cNvPr id="17" name="Rounded Rectangle 16"/>
+          <p:cNvSpPr/>
+          <p:nvPr/>
+        </p:nvSpPr>
+        <p:spPr>
+          <a:xfrm>
+            <a:off x="502920" y="4123944"/>
+            <a:ext cx="11201400" cy="749808"/>
+          </a:xfrm>
+          <a:prstGeom prst="roundRect">
+            <a:avLst>
+              <a:gd name="adj" fmla="val 12000"/>
+            </a:avLst>
+          </a:prstGeom>
+          <a:solidFill>
+            <a:srgbClr val="F1ECDD"/>
+          </a:solidFill>
+          <a:ln w="12700">
+            <a:solidFill>
+              <a:srgbClr val="C99A3E"/>
+            </a:solidFill>
+          </a:ln>
+          <a:effectLst/>
+        </p:spPr>
+        <p:style>
+          <a:lnRef idx="1">
+            <a:schemeClr val="accent1"/>
+          </a:lnRef>
+          <a:fillRef idx="3">
+            <a:schemeClr val="accent1"/>
+          </a:fillRef>
+          <a:effectRef idx="2">
+            <a:schemeClr val="accent1"/>
+          </a:effectRef>
+          <a:fontRef idx="minor">
+            <a:schemeClr val="lt1"/>
+          </a:fontRef>
+        </p:style>
+        <p:txBody>
+          <a:bodyPr rtlCol="0" anchor="ctr"/>
+          <a:lstStyle/>
+          <a:p>
+            <a:pPr algn="ctr"/>
+          </a:p>
+        </p:txBody>
+      </p:sp>
+      <p:sp>
+        <p:nvSpPr>
+          <p:cNvPr id="18" name="TextBox 17"/>
+          <p:cNvSpPr txBox="1"/>
+          <p:nvPr/>
+        </p:nvSpPr>
+        <p:spPr>
+          <a:xfrm>
+            <a:off x="731520" y="4197096"/>
+            <a:ext cx="3246120" cy="548640"/>
+          </a:xfrm>
+          <a:prstGeom prst="rect">
+            <a:avLst/>
+          </a:prstGeom>
+          <a:noFill/>
+        </p:spPr>
+        <p:txBody>
+          <a:bodyPr wrap="square" anchor="t" lIns="0" rIns="0" tIns="0" bIns="0">
+            <a:spAutoFit/>
+          </a:bodyPr>
+          <a:lstStyle/>
+          <a:p>
+            <a:pPr algn="l">
+              <a:lnSpc>
+                <a:spcPct val="100000"/>
+              </a:lnSpc>
+            </a:pPr>
+            <a:r>
+              <a:rPr sz="1100" b="1" i="0">
+                <a:solidFill>
+                  <a:srgbClr val="123D30"/>
+                </a:solidFill>
+                <a:latin typeface="Consolas"/>
+              </a:rPr>
+              <a:t>/bmad-agent-architect</a:t>
+            </a:r>
+          </a:p>
+        </p:txBody>
+      </p:sp>
+      <p:sp>
+        <p:nvSpPr>
+          <p:cNvPr id="19" name="TextBox 18"/>
+          <p:cNvSpPr txBox="1"/>
+          <p:nvPr/>
+        </p:nvSpPr>
+        <p:spPr>
+          <a:xfrm>
+            <a:off x="4069080" y="4197096"/>
+            <a:ext cx="7498079" cy="621792"/>
+          </a:xfrm>
+          <a:prstGeom prst="rect">
+            <a:avLst/>
+          </a:prstGeom>
+          <a:noFill/>
+        </p:spPr>
+        <p:txBody>
+          <a:bodyPr wrap="square" anchor="t" lIns="0" rIns="0" tIns="0" bIns="0">
+            <a:spAutoFit/>
+          </a:bodyPr>
+          <a:lstStyle/>
+          <a:p>
+            <a:pPr algn="l">
+              <a:lnSpc>
+                <a:spcPct val="105000"/>
+              </a:lnSpc>
+            </a:pPr>
+            <a:r>
+              <a:rPr sz="1050" b="0" i="1">
+                <a:solidFill>
+                  <a:srgbClr val="222A24"/>
+                </a:solidFill>
+                <a:latin typeface="Calibri"/>
+              </a:rPr>
+              <a:t>“Produce the Architecture Spine and Solution Design for TalentPilot-AI as a modular monolith — React SPA, FastAPI, PostgreSQL+pgvector — zero paid infrastructure, local Docker only.”</a:t>
+            </a:r>
+          </a:p>
+        </p:txBody>
+      </p:sp>
+      <p:sp>
+        <p:nvSpPr>
+          <p:cNvPr id="20" name="Rounded Rectangle 19"/>
+          <p:cNvSpPr/>
+          <p:nvPr/>
+        </p:nvSpPr>
+        <p:spPr>
+          <a:xfrm>
+            <a:off x="502920" y="4965192"/>
+            <a:ext cx="11201400" cy="749808"/>
+          </a:xfrm>
+          <a:prstGeom prst="roundRect">
+            <a:avLst>
+              <a:gd name="adj" fmla="val 12000"/>
+            </a:avLst>
+          </a:prstGeom>
+          <a:solidFill>
+            <a:srgbClr val="F1ECDD"/>
+          </a:solidFill>
+          <a:ln w="12700">
+            <a:solidFill>
+              <a:srgbClr val="C99A3E"/>
+            </a:solidFill>
+          </a:ln>
+          <a:effectLst/>
+        </p:spPr>
+        <p:style>
+          <a:lnRef idx="1">
+            <a:schemeClr val="accent1"/>
+          </a:lnRef>
+          <a:fillRef idx="3">
+            <a:schemeClr val="accent1"/>
+          </a:fillRef>
+          <a:effectRef idx="2">
+            <a:schemeClr val="accent1"/>
+          </a:effectRef>
+          <a:fontRef idx="minor">
+            <a:schemeClr val="lt1"/>
+          </a:fontRef>
+        </p:style>
+        <p:txBody>
+          <a:bodyPr rtlCol="0" anchor="ctr"/>
+          <a:lstStyle/>
+          <a:p>
+            <a:pPr algn="ctr"/>
+          </a:p>
+        </p:txBody>
+      </p:sp>
+      <p:sp>
+        <p:nvSpPr>
+          <p:cNvPr id="21" name="TextBox 20"/>
+          <p:cNvSpPr txBox="1"/>
+          <p:nvPr/>
+        </p:nvSpPr>
+        <p:spPr>
+          <a:xfrm>
+            <a:off x="731520" y="5038344"/>
+            <a:ext cx="3246120" cy="548640"/>
+          </a:xfrm>
+          <a:prstGeom prst="rect">
+            <a:avLst/>
+          </a:prstGeom>
+          <a:noFill/>
+        </p:spPr>
+        <p:txBody>
+          <a:bodyPr wrap="square" anchor="t" lIns="0" rIns="0" tIns="0" bIns="0">
+            <a:spAutoFit/>
+          </a:bodyPr>
+          <a:lstStyle/>
+          <a:p>
+            <a:pPr algn="l">
+              <a:lnSpc>
+                <a:spcPct val="100000"/>
+              </a:lnSpc>
+            </a:pPr>
+            <a:r>
+              <a:rPr sz="1100" b="1" i="0">
+                <a:solidFill>
+                  <a:srgbClr val="123D30"/>
+                </a:solidFill>
+                <a:latin typeface="Consolas"/>
+              </a:rPr>
+              <a:t>/bmad-check-implementation-readiness</a:t>
+            </a:r>
+          </a:p>
+        </p:txBody>
+      </p:sp>
+      <p:sp>
+        <p:nvSpPr>
+          <p:cNvPr id="22" name="TextBox 21"/>
+          <p:cNvSpPr txBox="1"/>
+          <p:nvPr/>
+        </p:nvSpPr>
+        <p:spPr>
+          <a:xfrm>
+            <a:off x="4069080" y="5038344"/>
+            <a:ext cx="7498079" cy="621792"/>
+          </a:xfrm>
+          <a:prstGeom prst="rect">
+            <a:avLst/>
+          </a:prstGeom>
+          <a:noFill/>
+        </p:spPr>
+        <p:txBody>
+          <a:bodyPr wrap="square" anchor="t" lIns="0" rIns="0" tIns="0" bIns="0">
+            <a:spAutoFit/>
+          </a:bodyPr>
+          <a:lstStyle/>
+          <a:p>
+            <a:pPr algn="l">
+              <a:lnSpc>
+                <a:spcPct val="105000"/>
+              </a:lnSpc>
+            </a:pPr>
+            <a:r>
+              <a:rPr sz="1050" b="0" i="1">
+                <a:solidFill>
+                  <a:srgbClr val="222A24"/>
+                </a:solidFill>
+                <a:latin typeface="Calibri"/>
+              </a:rPr>
+              <a:t>“Check implementation readiness” — validate PRD, UX, Architecture, and Epics are complete and internally consistent before any story work begins.</a:t>
+            </a:r>
+          </a:p>
+        </p:txBody>
+      </p:sp>
+      <p:sp>
+        <p:nvSpPr>
+          <p:cNvPr id="23" name="Rounded Rectangle 22"/>
+          <p:cNvSpPr/>
+          <p:nvPr/>
+        </p:nvSpPr>
+        <p:spPr>
+          <a:xfrm>
+            <a:off x="502920" y="5806440"/>
+            <a:ext cx="11201400" cy="749808"/>
+          </a:xfrm>
+          <a:prstGeom prst="roundRect">
+            <a:avLst>
+              <a:gd name="adj" fmla="val 12000"/>
+            </a:avLst>
+          </a:prstGeom>
+          <a:solidFill>
+            <a:srgbClr val="F1ECDD"/>
+          </a:solidFill>
+          <a:ln w="12700">
+            <a:solidFill>
+              <a:srgbClr val="C99A3E"/>
+            </a:solidFill>
+          </a:ln>
+          <a:effectLst/>
+        </p:spPr>
+        <p:style>
+          <a:lnRef idx="1">
+            <a:schemeClr val="accent1"/>
+          </a:lnRef>
+          <a:fillRef idx="3">
+            <a:schemeClr val="accent1"/>
+          </a:fillRef>
+          <a:effectRef idx="2">
+            <a:schemeClr val="accent1"/>
+          </a:effectRef>
+          <a:fontRef idx="minor">
+            <a:schemeClr val="lt1"/>
+          </a:fontRef>
+        </p:style>
+        <p:txBody>
+          <a:bodyPr rtlCol="0" anchor="ctr"/>
+          <a:lstStyle/>
+          <a:p>
+            <a:pPr algn="ctr"/>
+          </a:p>
+        </p:txBody>
+      </p:sp>
+      <p:sp>
+        <p:nvSpPr>
+          <p:cNvPr id="24" name="TextBox 23"/>
+          <p:cNvSpPr txBox="1"/>
+          <p:nvPr/>
+        </p:nvSpPr>
+        <p:spPr>
+          <a:xfrm>
+            <a:off x="731520" y="5879592"/>
+            <a:ext cx="3246120" cy="548640"/>
+          </a:xfrm>
+          <a:prstGeom prst="rect">
+            <a:avLst/>
+          </a:prstGeom>
+          <a:noFill/>
+        </p:spPr>
+        <p:txBody>
+          <a:bodyPr wrap="square" anchor="t" lIns="0" rIns="0" tIns="0" bIns="0">
+            <a:spAutoFit/>
+          </a:bodyPr>
+          <a:lstStyle/>
+          <a:p>
+            <a:pPr algn="l">
+              <a:lnSpc>
+                <a:spcPct val="100000"/>
+              </a:lnSpc>
+            </a:pPr>
+            <a:r>
+              <a:rPr sz="1100" b="1" i="0">
+                <a:solidFill>
+                  <a:srgbClr val="123D30"/>
+                </a:solidFill>
+                <a:latin typeface="Consolas"/>
+              </a:rPr>
+              <a:t>/bmad-sprint-planning</a:t>
+            </a:r>
+          </a:p>
+        </p:txBody>
+      </p:sp>
+      <p:sp>
+        <p:nvSpPr>
+          <p:cNvPr id="25" name="TextBox 24"/>
+          <p:cNvSpPr txBox="1"/>
+          <p:nvPr/>
+        </p:nvSpPr>
+        <p:spPr>
+          <a:xfrm>
+            <a:off x="4069080" y="5879592"/>
+            <a:ext cx="7498079" cy="621792"/>
+          </a:xfrm>
+          <a:prstGeom prst="rect">
+            <a:avLst/>
+          </a:prstGeom>
+          <a:noFill/>
+        </p:spPr>
+        <p:txBody>
+          <a:bodyPr wrap="square" anchor="t" lIns="0" rIns="0" tIns="0" bIns="0">
+            <a:spAutoFit/>
+          </a:bodyPr>
+          <a:lstStyle/>
+          <a:p>
+            <a:pPr algn="l">
+              <a:lnSpc>
+                <a:spcPct val="105000"/>
+              </a:lnSpc>
+            </a:pPr>
+            <a:r>
+              <a:rPr sz="1050" b="0" i="1">
+                <a:solidFill>
+                  <a:srgbClr val="222A24"/>
+                </a:solidFill>
+                <a:latin typeface="Calibri"/>
+              </a:rPr>
+              <a:t>“Run sprint planning” — generate sprint-status.yaml tracking from the finalized epics.md so dev work can be sequenced.</a:t>
+            </a:r>
+          </a:p>
+        </p:txBody>
+      </p:sp>
+      <p:sp>
+        <p:nvSpPr>
+          <p:cNvPr id="26" name="TextBox 25"/>
+          <p:cNvSpPr txBox="1"/>
+          <p:nvPr/>
+        </p:nvSpPr>
+        <p:spPr>
+          <a:xfrm>
+            <a:off x="502920" y="6400800"/>
+            <a:ext cx="11155680" cy="320040"/>
+          </a:xfrm>
+          <a:prstGeom prst="rect">
+            <a:avLst/>
+          </a:prstGeom>
+          <a:noFill/>
+        </p:spPr>
+        <p:txBody>
+          <a:bodyPr wrap="square" anchor="t" lIns="0" rIns="0" tIns="0" bIns="0">
+            <a:spAutoFit/>
+          </a:bodyPr>
+          <a:lstStyle/>
+          <a:p>
+            <a:pPr algn="l">
+              <a:lnSpc>
+                <a:spcPct val="100000"/>
+              </a:lnSpc>
+            </a:pPr>
+            <a:r>
+              <a:rPr sz="950" b="0" i="1">
+                <a:solidFill>
+                  <a:srgbClr val="5B665E"/>
+                </a:solidFill>
+                <a:latin typeface="Calibri"/>
+              </a:rPr>
+              <a:t>Source: .memlog.md session logs under _bmad-output/ — each skill append-logs its own driving decisions and inputs as it runs.</a:t>
+            </a:r>
+          </a:p>
+        </p:txBody>
+      </p:sp>
+    </p:spTree>
+  </p:cSld>
+  <p:clrMapOvr>
+    <a:masterClrMapping/>
+  </p:clrMapOvr>
+</p:sld>
+</file>
+
+<file path=ppt/slides/slide13.xml><?xml version="1.0" encoding="utf-8"?>
+<p:sld xmlns:a="http://schemas.openxmlformats.org/drawingml/2006/main" xmlns:p="http://schemas.openxmlformats.org/presentationml/2006/main" xmlns:r="http://schemas.openxmlformats.org/officeDocument/2006/relationships">
+  <p:cSld>
+    <p:bg>
+      <p:bgPr>
+        <a:blipFill dpi="0" rotWithShape="1">
+          <a:blip r:embed="rId2">
+            <a:alphaModFix amt="6000"/>
+            <a:lum/>
+          </a:blip>
+          <a:srcRect/>
+          <a:stretch>
+            <a:fillRect/>
+          </a:stretch>
+        </a:blipFill>
+        <a:effectLst/>
+      </p:bgPr>
+    </p:bg>
+    <p:spTree>
+      <p:nvGrpSpPr>
+        <p:cNvPr id="1" name=""/>
+        <p:cNvGrpSpPr/>
+        <p:nvPr/>
+      </p:nvGrpSpPr>
+      <p:grpSpPr/>
+      <p:sp>
+        <p:nvSpPr>
+          <p:cNvPr id="2" name="Rectangle 1"/>
+          <p:cNvSpPr/>
+          <p:nvPr/>
+        </p:nvSpPr>
+        <p:spPr>
+          <a:xfrm>
+            <a:off x="0" y="0"/>
+            <a:ext cx="12191695" cy="1051560"/>
+          </a:xfrm>
+          <a:prstGeom prst="rect">
+            <a:avLst/>
+          </a:prstGeom>
+          <a:solidFill>
+            <a:srgbClr val="123D30"/>
+          </a:solidFill>
+          <a:ln>
+            <a:noFill/>
+          </a:ln>
+          <a:effectLst/>
+        </p:spPr>
+        <p:style>
+          <a:lnRef idx="1">
+            <a:schemeClr val="accent1"/>
+          </a:lnRef>
+          <a:fillRef idx="3">
+            <a:schemeClr val="accent1"/>
+          </a:fillRef>
+          <a:effectRef idx="2">
+            <a:schemeClr val="accent1"/>
+          </a:effectRef>
+          <a:fontRef idx="minor">
+            <a:schemeClr val="lt1"/>
+          </a:fontRef>
+        </p:style>
+        <p:txBody>
+          <a:bodyPr rtlCol="0" anchor="ctr"/>
+          <a:lstStyle/>
+          <a:p>
+            <a:pPr algn="ctr"/>
+          </a:p>
+        </p:txBody>
+      </p:sp>
+      <p:sp>
+        <p:nvSpPr>
+          <p:cNvPr id="3" name="Rectangle 2"/>
+          <p:cNvSpPr/>
+          <p:nvPr/>
+        </p:nvSpPr>
+        <p:spPr>
+          <a:xfrm>
+            <a:off x="0" y="1051560"/>
+            <a:ext cx="12191695" cy="38100"/>
+          </a:xfrm>
+          <a:prstGeom prst="rect">
+            <a:avLst/>
+          </a:prstGeom>
+          <a:solidFill>
+            <a:srgbClr val="C99A3E"/>
+          </a:solidFill>
+          <a:ln>
+            <a:noFill/>
+          </a:ln>
+          <a:effectLst/>
+        </p:spPr>
+        <p:style>
+          <a:lnRef idx="1">
+            <a:schemeClr val="accent1"/>
+          </a:lnRef>
+          <a:fillRef idx="3">
+            <a:schemeClr val="accent1"/>
+          </a:fillRef>
+          <a:effectRef idx="2">
+            <a:schemeClr val="accent1"/>
+          </a:effectRef>
+          <a:fontRef idx="minor">
+            <a:schemeClr val="lt1"/>
+          </a:fontRef>
+        </p:style>
+        <p:txBody>
+          <a:bodyPr rtlCol="0" anchor="ctr"/>
+          <a:lstStyle/>
+          <a:p>
+            <a:pPr algn="ctr"/>
+          </a:p>
+        </p:txBody>
+      </p:sp>
+      <p:sp>
+        <p:nvSpPr>
+          <p:cNvPr id="4" name="TextBox 3"/>
+          <p:cNvSpPr txBox="1"/>
+          <p:nvPr/>
+        </p:nvSpPr>
+        <p:spPr>
+          <a:xfrm>
+            <a:off x="502920" y="128016"/>
+            <a:ext cx="1371600" cy="365760"/>
+          </a:xfrm>
+          <a:prstGeom prst="rect">
+            <a:avLst/>
+          </a:prstGeom>
+          <a:noFill/>
+        </p:spPr>
+        <p:txBody>
+          <a:bodyPr wrap="square" anchor="t" lIns="0" rIns="0" tIns="0" bIns="0">
+            <a:spAutoFit/>
+          </a:bodyPr>
+          <a:lstStyle/>
+          <a:p>
+            <a:pPr algn="l">
+              <a:lnSpc>
+                <a:spcPct val="100000"/>
+              </a:lnSpc>
+            </a:pPr>
+            <a:r>
+              <a:rPr sz="1500" b="1" i="0">
+                <a:solidFill>
+                  <a:srgbClr val="4FB093"/>
+                </a:solidFill>
+                <a:latin typeface="Calibri"/>
+              </a:rPr>
+              <a:t>11</a:t>
             </a:r>
           </a:p>
         </p:txBody>
@@ -6728,7 +7852,7 @@
 </p:sld>
 </file>
 
-<file path=ppt/slides/slide13.xml><?xml version="1.0" encoding="utf-8"?>
+<file path=ppt/slides/slide14.xml><?xml version="1.0" encoding="utf-8"?>
 <p:sld xmlns:a="http://schemas.openxmlformats.org/drawingml/2006/main" xmlns:p="http://schemas.openxmlformats.org/presentationml/2006/main" xmlns:r="http://schemas.openxmlformats.org/officeDocument/2006/relationships">
   <p:cSld>
     <p:bg>
@@ -6875,7 +7999,7 @@
                 </a:solidFill>
                 <a:latin typeface="Calibri"/>
               </a:rPr>
-              <a:t>11</a:t>
+              <a:t>12</a:t>
             </a:r>
           </a:p>
         </p:txBody>
@@ -7585,7 +8709,7 @@
 </p:sld>
 </file>
 
-<file path=ppt/slides/slide14.xml><?xml version="1.0" encoding="utf-8"?>
+<file path=ppt/slides/slide15.xml><?xml version="1.0" encoding="utf-8"?>
 <p:sld xmlns:a="http://schemas.openxmlformats.org/drawingml/2006/main" xmlns:p="http://schemas.openxmlformats.org/presentationml/2006/main" xmlns:r="http://schemas.openxmlformats.org/officeDocument/2006/relationships">
   <p:cSld>
     <p:bg>
@@ -14754,6 +15878,707 @@
 <file path=ppt/slides/slide8.xml><?xml version="1.0" encoding="utf-8"?>
 <p:sld xmlns:a="http://schemas.openxmlformats.org/drawingml/2006/main" xmlns:p="http://schemas.openxmlformats.org/presentationml/2006/main" xmlns:r="http://schemas.openxmlformats.org/officeDocument/2006/relationships">
   <p:cSld>
+    <p:spTree>
+      <p:nvGrpSpPr>
+        <p:cNvPr id="1" name=""/>
+        <p:cNvGrpSpPr/>
+        <p:nvPr/>
+      </p:nvGrpSpPr>
+      <p:grpSpPr/>
+      <p:sp>
+        <p:nvSpPr>
+          <p:cNvPr id="2" name="Rectangle 1"/>
+          <p:cNvSpPr/>
+          <p:nvPr/>
+        </p:nvSpPr>
+        <p:spPr>
+          <a:xfrm>
+            <a:off x="0" y="0"/>
+            <a:ext cx="12191695" cy="1051560"/>
+          </a:xfrm>
+          <a:prstGeom prst="rect">
+            <a:avLst/>
+          </a:prstGeom>
+          <a:solidFill>
+            <a:srgbClr val="123D30"/>
+          </a:solidFill>
+          <a:ln>
+            <a:noFill/>
+          </a:ln>
+          <a:effectLst/>
+        </p:spPr>
+        <p:style>
+          <a:lnRef idx="1">
+            <a:schemeClr val="accent1"/>
+          </a:lnRef>
+          <a:fillRef idx="3">
+            <a:schemeClr val="accent1"/>
+          </a:fillRef>
+          <a:effectRef idx="2">
+            <a:schemeClr val="accent1"/>
+          </a:effectRef>
+          <a:fontRef idx="minor">
+            <a:schemeClr val="lt1"/>
+          </a:fontRef>
+        </p:style>
+        <p:txBody>
+          <a:bodyPr rtlCol="0" anchor="ctr"/>
+          <a:lstStyle/>
+          <a:p>
+            <a:pPr algn="ctr"/>
+          </a:p>
+        </p:txBody>
+      </p:sp>
+      <p:sp>
+        <p:nvSpPr>
+          <p:cNvPr id="3" name="Rectangle 2"/>
+          <p:cNvSpPr/>
+          <p:nvPr/>
+        </p:nvSpPr>
+        <p:spPr>
+          <a:xfrm>
+            <a:off x="0" y="1051560"/>
+            <a:ext cx="12191695" cy="38100"/>
+          </a:xfrm>
+          <a:prstGeom prst="rect">
+            <a:avLst/>
+          </a:prstGeom>
+          <a:solidFill>
+            <a:srgbClr val="C99A3E"/>
+          </a:solidFill>
+          <a:ln>
+            <a:noFill/>
+          </a:ln>
+          <a:effectLst/>
+        </p:spPr>
+        <p:style>
+          <a:lnRef idx="1">
+            <a:schemeClr val="accent1"/>
+          </a:lnRef>
+          <a:fillRef idx="3">
+            <a:schemeClr val="accent1"/>
+          </a:fillRef>
+          <a:effectRef idx="2">
+            <a:schemeClr val="accent1"/>
+          </a:effectRef>
+          <a:fontRef idx="minor">
+            <a:schemeClr val="lt1"/>
+          </a:fontRef>
+        </p:style>
+        <p:txBody>
+          <a:bodyPr rtlCol="0" anchor="ctr"/>
+          <a:lstStyle/>
+          <a:p>
+            <a:pPr algn="ctr"/>
+          </a:p>
+        </p:txBody>
+      </p:sp>
+      <p:sp>
+        <p:nvSpPr>
+          <p:cNvPr id="4" name="TextBox 3"/>
+          <p:cNvSpPr txBox="1"/>
+          <p:nvPr/>
+        </p:nvSpPr>
+        <p:spPr>
+          <a:xfrm>
+            <a:off x="502920" y="128016"/>
+            <a:ext cx="1371600" cy="365760"/>
+          </a:xfrm>
+          <a:prstGeom prst="rect">
+            <a:avLst/>
+          </a:prstGeom>
+          <a:noFill/>
+        </p:spPr>
+        <p:txBody>
+          <a:bodyPr wrap="square" lIns="0" rIns="0" tIns="0" bIns="0">
+            <a:spAutoFit/>
+          </a:bodyPr>
+          <a:lstStyle/>
+          <a:p>
+            <a:pPr algn="l"/>
+            <a:r>
+              <a:rPr sz="1500" b="1">
+                <a:solidFill>
+                  <a:srgbClr val="4FB093"/>
+                </a:solidFill>
+                <a:latin typeface="Calibri"/>
+              </a:rPr>
+              <a:t>06</a:t>
+            </a:r>
+          </a:p>
+        </p:txBody>
+      </p:sp>
+      <p:sp>
+        <p:nvSpPr>
+          <p:cNvPr id="5" name="TextBox 4"/>
+          <p:cNvSpPr txBox="1"/>
+          <p:nvPr/>
+        </p:nvSpPr>
+        <p:spPr>
+          <a:xfrm>
+            <a:off x="502920" y="420624"/>
+            <a:ext cx="10515600" cy="594360"/>
+          </a:xfrm>
+          <a:prstGeom prst="rect">
+            <a:avLst/>
+          </a:prstGeom>
+          <a:noFill/>
+        </p:spPr>
+        <p:txBody>
+          <a:bodyPr wrap="square" lIns="0" rIns="0" tIns="0" bIns="0">
+            <a:spAutoFit/>
+          </a:bodyPr>
+          <a:lstStyle/>
+          <a:p>
+            <a:pPr algn="l"/>
+            <a:r>
+              <a:rPr sz="2800" b="1">
+                <a:solidFill>
+                  <a:srgbClr val="FFFFFF"/>
+                </a:solidFill>
+                <a:latin typeface="Georgia"/>
+              </a:rPr>
+              <a:t>Reference Documentation</a:t>
+            </a:r>
+          </a:p>
+        </p:txBody>
+      </p:sp>
+      <p:sp>
+        <p:nvSpPr>
+          <p:cNvPr id="6" name="TextBox 5"/>
+          <p:cNvSpPr txBox="1"/>
+          <p:nvPr/>
+        </p:nvSpPr>
+        <p:spPr>
+          <a:xfrm>
+            <a:off x="502920" y="1170432"/>
+            <a:ext cx="10972800" cy="365760"/>
+          </a:xfrm>
+          <a:prstGeom prst="rect">
+            <a:avLst/>
+          </a:prstGeom>
+          <a:noFill/>
+        </p:spPr>
+        <p:txBody>
+          <a:bodyPr wrap="square" lIns="0" rIns="0" tIns="0" bIns="0">
+            <a:spAutoFit/>
+          </a:bodyPr>
+          <a:lstStyle/>
+          <a:p>
+            <a:pPr algn="l"/>
+            <a:r>
+              <a:rPr sz="1300" b="0">
+                <a:solidFill>
+                  <a:srgbClr val="5B665E"/>
+                </a:solidFill>
+                <a:latin typeface="Calibri"/>
+              </a:rPr>
+              <a:t>Deep-dive design docs behind the architecture — semantic matching, and the progress-tracking API calls</a:t>
+            </a:r>
+          </a:p>
+        </p:txBody>
+      </p:sp>
+      <p:sp>
+        <p:nvSpPr>
+          <p:cNvPr id="7" name="TextBox 6"/>
+          <p:cNvSpPr txBox="1"/>
+          <p:nvPr/>
+        </p:nvSpPr>
+        <p:spPr>
+          <a:xfrm>
+            <a:off x="502920" y="6528816"/>
+            <a:ext cx="5486400" cy="274320"/>
+          </a:xfrm>
+          <a:prstGeom prst="rect">
+            <a:avLst/>
+          </a:prstGeom>
+          <a:noFill/>
+        </p:spPr>
+        <p:txBody>
+          <a:bodyPr wrap="square" lIns="0" rIns="0" tIns="0" bIns="0">
+            <a:spAutoFit/>
+          </a:bodyPr>
+          <a:lstStyle/>
+          <a:p>
+            <a:pPr algn="l"/>
+            <a:r>
+              <a:rPr sz="900" b="0">
+                <a:solidFill>
+                  <a:srgbClr val="5B665E"/>
+                </a:solidFill>
+                <a:latin typeface="Calibri"/>
+              </a:rPr>
+              <a:t>TalentPilot-AI · SAILS Software Internal Pilot</a:t>
+            </a:r>
+          </a:p>
+        </p:txBody>
+      </p:sp>
+      <p:sp>
+        <p:nvSpPr>
+          <p:cNvPr id="8" name="Rounded Rectangle 7"/>
+          <p:cNvSpPr/>
+          <p:nvPr/>
+        </p:nvSpPr>
+        <p:spPr>
+          <a:xfrm>
+            <a:off x="502920" y="1600200"/>
+            <a:ext cx="11201400" cy="1188720"/>
+          </a:xfrm>
+          <a:prstGeom prst="roundRect">
+            <a:avLst/>
+          </a:prstGeom>
+          <a:solidFill>
+            <a:srgbClr val="E3F0EA"/>
+          </a:solidFill>
+          <a:ln w="15875">
+            <a:solidFill>
+              <a:srgbClr val="4FB093"/>
+            </a:solidFill>
+          </a:ln>
+          <a:effectLst/>
+        </p:spPr>
+        <p:style>
+          <a:lnRef idx="1">
+            <a:schemeClr val="accent1"/>
+          </a:lnRef>
+          <a:fillRef idx="3">
+            <a:schemeClr val="accent1"/>
+          </a:fillRef>
+          <a:effectRef idx="2">
+            <a:schemeClr val="accent1"/>
+          </a:effectRef>
+          <a:fontRef idx="minor">
+            <a:schemeClr val="lt1"/>
+          </a:fontRef>
+        </p:style>
+        <p:txBody>
+          <a:bodyPr rtlCol="0" anchor="ctr"/>
+          <a:lstStyle/>
+          <a:p>
+            <a:pPr algn="ctr"/>
+          </a:p>
+        </p:txBody>
+      </p:sp>
+      <p:sp>
+        <p:nvSpPr>
+          <p:cNvPr id="9" name="TextBox 8"/>
+          <p:cNvSpPr txBox="1"/>
+          <p:nvPr/>
+        </p:nvSpPr>
+        <p:spPr>
+          <a:xfrm>
+            <a:off x="731520" y="1737360"/>
+            <a:ext cx="10744200" cy="320040"/>
+          </a:xfrm>
+          <a:prstGeom prst="rect">
+            <a:avLst/>
+          </a:prstGeom>
+          <a:noFill/>
+        </p:spPr>
+        <p:txBody>
+          <a:bodyPr wrap="square" lIns="0" rIns="0" tIns="0" bIns="0">
+            <a:spAutoFit/>
+          </a:bodyPr>
+          <a:lstStyle/>
+          <a:p>
+            <a:pPr algn="l"/>
+            <a:r>
+              <a:rPr sz="1350" b="1" u="sng">
+                <a:solidFill>
+                  <a:srgbClr val="123D30"/>
+                </a:solidFill>
+                <a:latin typeface="Consolas"/>
+                <a:hlinkClick r:id="rId2"/>
+              </a:rPr>
+              <a:t>Diagrams/SKILL-MATCH-DESIGN.md</a:t>
+            </a:r>
+          </a:p>
+        </p:txBody>
+      </p:sp>
+      <p:sp>
+        <p:nvSpPr>
+          <p:cNvPr id="10" name="TextBox 9"/>
+          <p:cNvSpPr txBox="1"/>
+          <p:nvPr/>
+        </p:nvSpPr>
+        <p:spPr>
+          <a:xfrm>
+            <a:off x="731520" y="2057400"/>
+            <a:ext cx="10744200" cy="640080"/>
+          </a:xfrm>
+          <a:prstGeom prst="rect">
+            <a:avLst/>
+          </a:prstGeom>
+          <a:noFill/>
+        </p:spPr>
+        <p:txBody>
+          <a:bodyPr wrap="square" lIns="0" rIns="0" tIns="0" bIns="0">
+            <a:spAutoFit/>
+          </a:bodyPr>
+          <a:lstStyle/>
+          <a:p>
+            <a:pPr algn="l"/>
+            <a:r>
+              <a:rPr sz="1150" b="0">
+                <a:solidFill>
+                  <a:srgbClr val="222A24"/>
+                </a:solidFill>
+                <a:latin typeface="Calibri"/>
+              </a:rPr>
+              <a:t>How YouTube videos become Skill matches — ingestion, embeddings, and how GET /api/content/match ranks candidates for a Skill using offline semantic similarity, not keyword search.</a:t>
+            </a:r>
+          </a:p>
+        </p:txBody>
+      </p:sp>
+      <p:sp>
+        <p:nvSpPr>
+          <p:cNvPr id="11" name="Rounded Rectangle 10"/>
+          <p:cNvSpPr/>
+          <p:nvPr/>
+        </p:nvSpPr>
+        <p:spPr>
+          <a:xfrm>
+            <a:off x="502920" y="2971800"/>
+            <a:ext cx="11201400" cy="1188720"/>
+          </a:xfrm>
+          <a:prstGeom prst="roundRect">
+            <a:avLst/>
+          </a:prstGeom>
+          <a:solidFill>
+            <a:srgbClr val="E3F0EA"/>
+          </a:solidFill>
+          <a:ln w="15875">
+            <a:solidFill>
+              <a:srgbClr val="4FB093"/>
+            </a:solidFill>
+          </a:ln>
+          <a:effectLst/>
+        </p:spPr>
+        <p:style>
+          <a:lnRef idx="1">
+            <a:schemeClr val="accent1"/>
+          </a:lnRef>
+          <a:fillRef idx="3">
+            <a:schemeClr val="accent1"/>
+          </a:fillRef>
+          <a:effectRef idx="2">
+            <a:schemeClr val="accent1"/>
+          </a:effectRef>
+          <a:fontRef idx="minor">
+            <a:schemeClr val="lt1"/>
+          </a:fontRef>
+        </p:style>
+        <p:txBody>
+          <a:bodyPr rtlCol="0" anchor="ctr"/>
+          <a:lstStyle/>
+          <a:p>
+            <a:pPr algn="ctr"/>
+          </a:p>
+        </p:txBody>
+      </p:sp>
+      <p:sp>
+        <p:nvSpPr>
+          <p:cNvPr id="12" name="TextBox 11"/>
+          <p:cNvSpPr txBox="1"/>
+          <p:nvPr/>
+        </p:nvSpPr>
+        <p:spPr>
+          <a:xfrm>
+            <a:off x="731520" y="3108960"/>
+            <a:ext cx="10744200" cy="320040"/>
+          </a:xfrm>
+          <a:prstGeom prst="rect">
+            <a:avLst/>
+          </a:prstGeom>
+          <a:noFill/>
+        </p:spPr>
+        <p:txBody>
+          <a:bodyPr wrap="square" lIns="0" rIns="0" tIns="0" bIns="0">
+            <a:spAutoFit/>
+          </a:bodyPr>
+          <a:lstStyle/>
+          <a:p>
+            <a:pPr algn="l"/>
+            <a:r>
+              <a:rPr sz="1350" b="1" u="sng">
+                <a:solidFill>
+                  <a:srgbClr val="123D30"/>
+                </a:solidFill>
+                <a:latin typeface="Consolas"/>
+                <a:hlinkClick r:id="rId3"/>
+              </a:rPr>
+              <a:t>Diagrams/PROGRESS-TRACKING-API-CALLS.md</a:t>
+            </a:r>
+          </a:p>
+        </p:txBody>
+      </p:sp>
+      <p:sp>
+        <p:nvSpPr>
+          <p:cNvPr id="13" name="TextBox 12"/>
+          <p:cNvSpPr txBox="1"/>
+          <p:nvPr/>
+        </p:nvSpPr>
+        <p:spPr>
+          <a:xfrm>
+            <a:off x="731520" y="3429000"/>
+            <a:ext cx="10744200" cy="640080"/>
+          </a:xfrm>
+          <a:prstGeom prst="rect">
+            <a:avLst/>
+          </a:prstGeom>
+          <a:noFill/>
+        </p:spPr>
+        <p:txBody>
+          <a:bodyPr wrap="square" lIns="0" rIns="0" tIns="0" bIns="0">
+            <a:spAutoFit/>
+          </a:bodyPr>
+          <a:lstStyle/>
+          <a:p>
+            <a:pPr algn="l"/>
+            <a:r>
+              <a:rPr sz="1150" b="0">
+                <a:solidFill>
+                  <a:srgbClr val="222A24"/>
+                </a:solidFill>
+                <a:latin typeface="Calibri"/>
+              </a:rPr>
+              <a:t>Companion to this deck's progress/ module — the exact endpoints called: a one-time resume GET on load, a batched POST every ~10s (never per-tick), retry/backoff rules, and the sendBeacon flush on tab close.</a:t>
+            </a:r>
+          </a:p>
+        </p:txBody>
+      </p:sp>
+      <p:sp>
+        <p:nvSpPr>
+          <p:cNvPr id="14" name="Rectangle 13"/>
+          <p:cNvSpPr/>
+          <p:nvPr/>
+        </p:nvSpPr>
+        <p:spPr>
+          <a:xfrm>
+            <a:off x="502920" y="4389120"/>
+            <a:ext cx="11201400" cy="822960"/>
+          </a:xfrm>
+          <a:prstGeom prst="rect">
+            <a:avLst/>
+          </a:prstGeom>
+          <a:solidFill>
+            <a:srgbClr val="E9F3EE"/>
+          </a:solidFill>
+          <a:ln>
+            <a:noFill/>
+          </a:ln>
+          <a:effectLst/>
+        </p:spPr>
+        <p:style>
+          <a:lnRef idx="1">
+            <a:schemeClr val="accent1"/>
+          </a:lnRef>
+          <a:fillRef idx="3">
+            <a:schemeClr val="accent1"/>
+          </a:fillRef>
+          <a:effectRef idx="2">
+            <a:schemeClr val="accent1"/>
+          </a:effectRef>
+          <a:fontRef idx="minor">
+            <a:schemeClr val="lt1"/>
+          </a:fontRef>
+        </p:style>
+        <p:txBody>
+          <a:bodyPr rtlCol="0" anchor="ctr"/>
+          <a:lstStyle/>
+          <a:p>
+            <a:pPr algn="ctr"/>
+          </a:p>
+        </p:txBody>
+      </p:sp>
+      <p:sp>
+        <p:nvSpPr>
+          <p:cNvPr id="15" name="TextBox 14"/>
+          <p:cNvSpPr txBox="1"/>
+          <p:nvPr/>
+        </p:nvSpPr>
+        <p:spPr>
+          <a:xfrm>
+            <a:off x="731520" y="4480560"/>
+            <a:ext cx="10744200" cy="274320"/>
+          </a:xfrm>
+          <a:prstGeom prst="rect">
+            <a:avLst/>
+          </a:prstGeom>
+          <a:noFill/>
+        </p:spPr>
+        <p:txBody>
+          <a:bodyPr wrap="square" lIns="0" rIns="0" tIns="0" bIns="0">
+            <a:spAutoFit/>
+          </a:bodyPr>
+          <a:lstStyle/>
+          <a:p>
+            <a:pPr algn="l"/>
+            <a:r>
+              <a:rPr sz="1300" b="1">
+                <a:solidFill>
+                  <a:srgbClr val="123D30"/>
+                </a:solidFill>
+                <a:latin typeface="Calibri"/>
+              </a:rPr>
+              <a:t>Why these are referenced here</a:t>
+            </a:r>
+          </a:p>
+        </p:txBody>
+      </p:sp>
+      <p:sp>
+        <p:nvSpPr>
+          <p:cNvPr id="16" name="TextBox 15"/>
+          <p:cNvSpPr txBox="1"/>
+          <p:nvPr/>
+        </p:nvSpPr>
+        <p:spPr>
+          <a:xfrm>
+            <a:off x="731520" y="4754880"/>
+            <a:ext cx="10744200" cy="457200"/>
+          </a:xfrm>
+          <a:prstGeom prst="rect">
+            <a:avLst/>
+          </a:prstGeom>
+          <a:noFill/>
+        </p:spPr>
+        <p:txBody>
+          <a:bodyPr wrap="square" lIns="0" rIns="0" tIns="0" bIns="0">
+            <a:spAutoFit/>
+          </a:bodyPr>
+          <a:lstStyle/>
+          <a:p>
+            <a:pPr algn="l"/>
+            <a:r>
+              <a:rPr sz="1150" b="0">
+                <a:solidFill>
+                  <a:srgbClr val="222A24"/>
+                </a:solidFill>
+                <a:latin typeface="Calibri"/>
+              </a:rPr>
+              <a:t>Both docs sit one level deeper than this overview — the matching-algorithm and API-call-level detail behind the architecture summarized on the previous slide.</a:t>
+            </a:r>
+          </a:p>
+        </p:txBody>
+      </p:sp>
+      <p:sp>
+        <p:nvSpPr>
+          <p:cNvPr id="17" name="TextBox 16"/>
+          <p:cNvSpPr txBox="1"/>
+          <p:nvPr/>
+        </p:nvSpPr>
+        <p:spPr>
+          <a:xfrm>
+            <a:off x="502920" y="5303520"/>
+            <a:ext cx="11201400" cy="320040"/>
+          </a:xfrm>
+          <a:prstGeom prst="rect">
+            <a:avLst/>
+          </a:prstGeom>
+          <a:noFill/>
+        </p:spPr>
+        <p:txBody>
+          <a:bodyPr wrap="square" lIns="0" rIns="0" tIns="0" bIns="0">
+            <a:spAutoFit/>
+          </a:bodyPr>
+          <a:lstStyle/>
+          <a:p>
+            <a:pPr algn="l"/>
+            <a:r>
+              <a:rPr sz="1050" b="0">
+                <a:solidFill>
+                  <a:srgbClr val="5B665E"/>
+                </a:solidFill>
+                <a:latin typeface="Calibri"/>
+              </a:rPr>
+              <a:t>Open directly on GitHub (main branch):</a:t>
+            </a:r>
+          </a:p>
+        </p:txBody>
+      </p:sp>
+      <p:sp>
+        <p:nvSpPr>
+          <p:cNvPr id="18" name="TextBox 17"/>
+          <p:cNvSpPr txBox="1"/>
+          <p:nvPr/>
+        </p:nvSpPr>
+        <p:spPr>
+          <a:xfrm>
+            <a:off x="502920" y="5669280"/>
+            <a:ext cx="11201400" cy="228600"/>
+          </a:xfrm>
+          <a:prstGeom prst="rect">
+            <a:avLst/>
+          </a:prstGeom>
+          <a:noFill/>
+        </p:spPr>
+        <p:txBody>
+          <a:bodyPr wrap="square" lIns="0" rIns="0" tIns="0" bIns="0">
+            <a:spAutoFit/>
+          </a:bodyPr>
+          <a:lstStyle/>
+          <a:p>
+            <a:pPr algn="l"/>
+            <a:r>
+              <a:rPr sz="1050" u="sng">
+                <a:solidFill>
+                  <a:srgbClr val="4FB093"/>
+                </a:solidFill>
+                <a:latin typeface="Consolas"/>
+                <a:hlinkClick r:id="rId2"/>
+              </a:rPr>
+              <a:t>https://github.com/PTirumalaVasu/TalentPilot-AI/blob/main/_bmad-output/planning-artifacts/architecture/architecture-TalentPilot-AI-2026-07-09/Diagrams/SKILL-MATCH-DESIGN.md</a:t>
+            </a:r>
+          </a:p>
+        </p:txBody>
+      </p:sp>
+      <p:sp>
+        <p:nvSpPr>
+          <p:cNvPr id="19" name="TextBox 18"/>
+          <p:cNvSpPr txBox="1"/>
+          <p:nvPr/>
+        </p:nvSpPr>
+        <p:spPr>
+          <a:xfrm>
+            <a:off x="502920" y="5943600"/>
+            <a:ext cx="11201400" cy="228600"/>
+          </a:xfrm>
+          <a:prstGeom prst="rect">
+            <a:avLst/>
+          </a:prstGeom>
+          <a:noFill/>
+        </p:spPr>
+        <p:txBody>
+          <a:bodyPr wrap="square" lIns="0" rIns="0" tIns="0" bIns="0">
+            <a:spAutoFit/>
+          </a:bodyPr>
+          <a:lstStyle/>
+          <a:p>
+            <a:pPr algn="l"/>
+            <a:r>
+              <a:rPr sz="1050" u="sng">
+                <a:solidFill>
+                  <a:srgbClr val="4FB093"/>
+                </a:solidFill>
+                <a:latin typeface="Consolas"/>
+                <a:hlinkClick r:id="rId3"/>
+              </a:rPr>
+              <a:t>https://github.com/PTirumalaVasu/TalentPilot-AI/blob/main/_bmad-output/planning-artifacts/architecture/architecture-TalentPilot-AI-2026-07-09/Diagrams/PROGRESS-TRACKING-API-CALLS.md</a:t>
+            </a:r>
+          </a:p>
+        </p:txBody>
+      </p:sp>
+    </p:spTree>
+  </p:cSld>
+  <p:clrMapOvr>
+    <a:masterClrMapping/>
+  </p:clrMapOvr>
+</p:sld>
+</file>
+
+<file path=ppt/slides/slide9.xml><?xml version="1.0" encoding="utf-8"?>
+<p:sld xmlns:a="http://schemas.openxmlformats.org/drawingml/2006/main" xmlns:p="http://schemas.openxmlformats.org/presentationml/2006/main" xmlns:r="http://schemas.openxmlformats.org/officeDocument/2006/relationships">
+  <p:cSld>
     <p:bg>
       <p:bgPr>
         <a:blipFill dpi="0" rotWithShape="1">
@@ -14898,7 +16723,7 @@
                 </a:solidFill>
                 <a:latin typeface="Calibri"/>
               </a:rPr>
-              <a:t>06</a:t>
+              <a:t>07</a:t>
             </a:r>
           </a:p>
         </p:txBody>
@@ -15573,1129 +17398,6 @@
 </p:sld>
 </file>
 
-<file path=ppt/slides/slide9.xml><?xml version="1.0" encoding="utf-8"?>
-<p:sld xmlns:a="http://schemas.openxmlformats.org/drawingml/2006/main" xmlns:p="http://schemas.openxmlformats.org/presentationml/2006/main" xmlns:r="http://schemas.openxmlformats.org/officeDocument/2006/relationships">
-  <p:cSld>
-    <p:bg>
-      <p:bgPr>
-        <a:blipFill dpi="0" rotWithShape="1">
-          <a:blip r:embed="rId2">
-            <a:alphaModFix amt="6000"/>
-            <a:lum/>
-          </a:blip>
-          <a:srcRect/>
-          <a:stretch>
-            <a:fillRect/>
-          </a:stretch>
-        </a:blipFill>
-        <a:effectLst/>
-      </p:bgPr>
-    </p:bg>
-    <p:spTree>
-      <p:nvGrpSpPr>
-        <p:cNvPr id="1" name=""/>
-        <p:cNvGrpSpPr/>
-        <p:nvPr/>
-      </p:nvGrpSpPr>
-      <p:grpSpPr/>
-      <p:sp>
-        <p:nvSpPr>
-          <p:cNvPr id="2" name="Rectangle 1"/>
-          <p:cNvSpPr/>
-          <p:nvPr/>
-        </p:nvSpPr>
-        <p:spPr>
-          <a:xfrm>
-            <a:off x="0" y="0"/>
-            <a:ext cx="12191695" cy="1051560"/>
-          </a:xfrm>
-          <a:prstGeom prst="rect">
-            <a:avLst/>
-          </a:prstGeom>
-          <a:solidFill>
-            <a:srgbClr val="123D30"/>
-          </a:solidFill>
-          <a:ln>
-            <a:noFill/>
-          </a:ln>
-          <a:effectLst/>
-        </p:spPr>
-        <p:style>
-          <a:lnRef idx="1">
-            <a:schemeClr val="accent1"/>
-          </a:lnRef>
-          <a:fillRef idx="3">
-            <a:schemeClr val="accent1"/>
-          </a:fillRef>
-          <a:effectRef idx="2">
-            <a:schemeClr val="accent1"/>
-          </a:effectRef>
-          <a:fontRef idx="minor">
-            <a:schemeClr val="lt1"/>
-          </a:fontRef>
-        </p:style>
-        <p:txBody>
-          <a:bodyPr rtlCol="0" anchor="ctr"/>
-          <a:lstStyle/>
-          <a:p>
-            <a:pPr algn="ctr"/>
-          </a:p>
-        </p:txBody>
-      </p:sp>
-      <p:sp>
-        <p:nvSpPr>
-          <p:cNvPr id="3" name="Rectangle 2"/>
-          <p:cNvSpPr/>
-          <p:nvPr/>
-        </p:nvSpPr>
-        <p:spPr>
-          <a:xfrm>
-            <a:off x="0" y="1051560"/>
-            <a:ext cx="12191695" cy="38100"/>
-          </a:xfrm>
-          <a:prstGeom prst="rect">
-            <a:avLst/>
-          </a:prstGeom>
-          <a:solidFill>
-            <a:srgbClr val="C99A3E"/>
-          </a:solidFill>
-          <a:ln>
-            <a:noFill/>
-          </a:ln>
-          <a:effectLst/>
-        </p:spPr>
-        <p:style>
-          <a:lnRef idx="1">
-            <a:schemeClr val="accent1"/>
-          </a:lnRef>
-          <a:fillRef idx="3">
-            <a:schemeClr val="accent1"/>
-          </a:fillRef>
-          <a:effectRef idx="2">
-            <a:schemeClr val="accent1"/>
-          </a:effectRef>
-          <a:fontRef idx="minor">
-            <a:schemeClr val="lt1"/>
-          </a:fontRef>
-        </p:style>
-        <p:txBody>
-          <a:bodyPr rtlCol="0" anchor="ctr"/>
-          <a:lstStyle/>
-          <a:p>
-            <a:pPr algn="ctr"/>
-          </a:p>
-        </p:txBody>
-      </p:sp>
-      <p:sp>
-        <p:nvSpPr>
-          <p:cNvPr id="4" name="TextBox 3"/>
-          <p:cNvSpPr txBox="1"/>
-          <p:nvPr/>
-        </p:nvSpPr>
-        <p:spPr>
-          <a:xfrm>
-            <a:off x="502920" y="128016"/>
-            <a:ext cx="1371600" cy="365760"/>
-          </a:xfrm>
-          <a:prstGeom prst="rect">
-            <a:avLst/>
-          </a:prstGeom>
-          <a:noFill/>
-        </p:spPr>
-        <p:txBody>
-          <a:bodyPr wrap="square" anchor="t" lIns="0" rIns="0" tIns="0" bIns="0">
-            <a:spAutoFit/>
-          </a:bodyPr>
-          <a:lstStyle/>
-          <a:p>
-            <a:pPr algn="l">
-              <a:lnSpc>
-                <a:spcPct val="100000"/>
-              </a:lnSpc>
-            </a:pPr>
-            <a:r>
-              <a:rPr sz="1500" b="1" i="0">
-                <a:solidFill>
-                  <a:srgbClr val="4FB093"/>
-                </a:solidFill>
-                <a:latin typeface="Calibri"/>
-              </a:rPr>
-              <a:t>07</a:t>
-            </a:r>
-          </a:p>
-        </p:txBody>
-      </p:sp>
-      <p:sp>
-        <p:nvSpPr>
-          <p:cNvPr id="5" name="TextBox 4"/>
-          <p:cNvSpPr txBox="1"/>
-          <p:nvPr/>
-        </p:nvSpPr>
-        <p:spPr>
-          <a:xfrm>
-            <a:off x="502920" y="420624"/>
-            <a:ext cx="10515600" cy="594360"/>
-          </a:xfrm>
-          <a:prstGeom prst="rect">
-            <a:avLst/>
-          </a:prstGeom>
-          <a:noFill/>
-        </p:spPr>
-        <p:txBody>
-          <a:bodyPr wrap="square" anchor="t" lIns="0" rIns="0" tIns="0" bIns="0">
-            <a:spAutoFit/>
-          </a:bodyPr>
-          <a:lstStyle/>
-          <a:p>
-            <a:pPr algn="l">
-              <a:lnSpc>
-                <a:spcPct val="100000"/>
-              </a:lnSpc>
-            </a:pPr>
-            <a:r>
-              <a:rPr sz="2800" b="1" i="0">
-                <a:solidFill>
-                  <a:srgbClr val="FFFFFF"/>
-                </a:solidFill>
-                <a:latin typeface="Georgia"/>
-              </a:rPr>
-              <a:t>BMAD &amp; WDS Skills Used — What Each One Does (1/2)</a:t>
-            </a:r>
-          </a:p>
-        </p:txBody>
-      </p:sp>
-      <p:sp>
-        <p:nvSpPr>
-          <p:cNvPr id="6" name="TextBox 5"/>
-          <p:cNvSpPr txBox="1"/>
-          <p:nvPr/>
-        </p:nvSpPr>
-        <p:spPr>
-          <a:xfrm>
-            <a:off x="502920" y="1170432"/>
-            <a:ext cx="10972800" cy="365760"/>
-          </a:xfrm>
-          <a:prstGeom prst="rect">
-            <a:avLst/>
-          </a:prstGeom>
-          <a:noFill/>
-        </p:spPr>
-        <p:txBody>
-          <a:bodyPr wrap="square" anchor="t" lIns="0" rIns="0" tIns="0" bIns="0">
-            <a:spAutoFit/>
-          </a:bodyPr>
-          <a:lstStyle/>
-          <a:p>
-            <a:pPr algn="l">
-              <a:lnSpc>
-                <a:spcPct val="100000"/>
-              </a:lnSpc>
-            </a:pPr>
-            <a:r>
-              <a:rPr sz="1300" b="0" i="1">
-                <a:solidFill>
-                  <a:srgbClr val="5B665E"/>
-                </a:solidFill>
-                <a:latin typeface="Calibri"/>
-              </a:rPr>
-              <a:t>22 skill invocations were used to plan and build TalentPilot-AI end to end</a:t>
-            </a:r>
-          </a:p>
-        </p:txBody>
-      </p:sp>
-      <p:sp>
-        <p:nvSpPr>
-          <p:cNvPr id="7" name="TextBox 6"/>
-          <p:cNvSpPr txBox="1"/>
-          <p:nvPr/>
-        </p:nvSpPr>
-        <p:spPr>
-          <a:xfrm>
-            <a:off x="502920" y="6528816"/>
-            <a:ext cx="5486400" cy="274320"/>
-          </a:xfrm>
-          <a:prstGeom prst="rect">
-            <a:avLst/>
-          </a:prstGeom>
-          <a:noFill/>
-        </p:spPr>
-        <p:txBody>
-          <a:bodyPr wrap="square" anchor="t" lIns="0" rIns="0" tIns="0" bIns="0">
-            <a:spAutoFit/>
-          </a:bodyPr>
-          <a:lstStyle/>
-          <a:p>
-            <a:pPr algn="l">
-              <a:lnSpc>
-                <a:spcPct val="100000"/>
-              </a:lnSpc>
-            </a:pPr>
-            <a:r>
-              <a:rPr sz="900" b="0" i="0">
-                <a:solidFill>
-                  <a:srgbClr val="5B665E"/>
-                </a:solidFill>
-                <a:latin typeface="Calibri"/>
-              </a:rPr>
-              <a:t>TalentPilot-AI · SAILS Software Internal Pilot</a:t>
-            </a:r>
-          </a:p>
-        </p:txBody>
-      </p:sp>
-      <p:graphicFrame>
-        <p:nvGraphicFramePr>
-          <p:cNvPr id="8" name="Table 7"/>
-          <p:cNvGraphicFramePr>
-            <a:graphicFrameLocks noGrp="1"/>
-          </p:cNvGraphicFramePr>
-          <p:nvPr/>
-        </p:nvGraphicFramePr>
-        <p:xfrm>
-          <a:off x="502920" y="1554480"/>
-          <a:ext cx="11201400" cy="4892040"/>
-        </p:xfrm>
-        <a:graphic>
-          <a:graphicData uri="http://schemas.openxmlformats.org/drawingml/2006/table">
-            <a:tbl>
-              <a:tblPr firstRow="1" bandRow="1">
-                <a:tableStyleId>{5C22544A-7EE6-4342-B048-85BDC9FD1C3A}</a:tableStyleId>
-              </a:tblPr>
-              <a:tblGrid>
-                <a:gridCol w="457200"/>
-                <a:gridCol w="3200400"/>
-                <a:gridCol w="7543800"/>
-              </a:tblGrid>
-              <a:tr h="407670">
-                <a:tc>
-                  <a:txBody>
-                    <a:bodyPr/>
-                    <a:lstStyle/>
-                    <a:p>
-                      <a:pPr algn="l"/>
-                      <a:r>
-                        <a:rPr b="1" sz="1300">
-                          <a:solidFill>
-                            <a:srgbClr val="FFFFFF"/>
-                          </a:solidFill>
-                          <a:latin typeface="Calibri"/>
-                        </a:rPr>
-                        <a:t>#</a:t>
-                      </a:r>
-                    </a:p>
-                  </a:txBody>
-                  <a:tcPr anchor="ctr">
-                    <a:solidFill>
-                      <a:srgbClr val="123D30"/>
-                    </a:solidFill>
-                  </a:tcPr>
-                </a:tc>
-                <a:tc>
-                  <a:txBody>
-                    <a:bodyPr/>
-                    <a:lstStyle/>
-                    <a:p>
-                      <a:pPr algn="l"/>
-                      <a:r>
-                        <a:rPr b="1" sz="1300">
-                          <a:solidFill>
-                            <a:srgbClr val="FFFFFF"/>
-                          </a:solidFill>
-                          <a:latin typeface="Calibri"/>
-                        </a:rPr>
-                        <a:t>Skill</a:t>
-                      </a:r>
-                    </a:p>
-                  </a:txBody>
-                  <a:tcPr anchor="ctr">
-                    <a:solidFill>
-                      <a:srgbClr val="123D30"/>
-                    </a:solidFill>
-                  </a:tcPr>
-                </a:tc>
-                <a:tc>
-                  <a:txBody>
-                    <a:bodyPr/>
-                    <a:lstStyle/>
-                    <a:p>
-                      <a:pPr algn="l"/>
-                      <a:r>
-                        <a:rPr b="1" sz="1300">
-                          <a:solidFill>
-                            <a:srgbClr val="FFFFFF"/>
-                          </a:solidFill>
-                          <a:latin typeface="Calibri"/>
-                        </a:rPr>
-                        <a:t>What it does, in one line</a:t>
-                      </a:r>
-                    </a:p>
-                  </a:txBody>
-                  <a:tcPr anchor="ctr">
-                    <a:solidFill>
-                      <a:srgbClr val="123D30"/>
-                    </a:solidFill>
-                  </a:tcPr>
-                </a:tc>
-              </a:tr>
-              <a:tr h="407670">
-                <a:tc>
-                  <a:txBody>
-                    <a:bodyPr/>
-                    <a:lstStyle/>
-                    <a:p>
-                      <a:r>
-                        <a:rPr sz="1150">
-                          <a:solidFill>
-                            <a:srgbClr val="222A24"/>
-                          </a:solidFill>
-                          <a:latin typeface="Calibri"/>
-                        </a:rPr>
-                        <a:t>1</a:t>
-                      </a:r>
-                    </a:p>
-                  </a:txBody>
-                  <a:tcPr anchor="ctr" marT="50800" marB="50800">
-                    <a:solidFill>
-                      <a:srgbClr val="FFFFFF"/>
-                    </a:solidFill>
-                  </a:tcPr>
-                </a:tc>
-                <a:tc>
-                  <a:txBody>
-                    <a:bodyPr/>
-                    <a:lstStyle/>
-                    <a:p>
-                      <a:r>
-                        <a:rPr sz="1150">
-                          <a:solidFill>
-                            <a:srgbClr val="222A24"/>
-                          </a:solidFill>
-                          <a:latin typeface="Calibri"/>
-                        </a:rPr>
-                        <a:t>/bmad-cis-agent-brainstorming-coach</a:t>
-                      </a:r>
-                    </a:p>
-                  </a:txBody>
-                  <a:tcPr anchor="ctr" marT="50800" marB="50800">
-                    <a:solidFill>
-                      <a:srgbClr val="FFFFFF"/>
-                    </a:solidFill>
-                  </a:tcPr>
-                </a:tc>
-                <a:tc>
-                  <a:txBody>
-                    <a:bodyPr/>
-                    <a:lstStyle/>
-                    <a:p>
-                      <a:r>
-                        <a:rPr sz="1150">
-                          <a:solidFill>
-                            <a:srgbClr val="222A24"/>
-                          </a:solidFill>
-                          <a:latin typeface="Calibri"/>
-                        </a:rPr>
-                        <a:t>Carson: elite facilitator who runs structured, technique-driven ideation sessions.</a:t>
-                      </a:r>
-                    </a:p>
-                  </a:txBody>
-                  <a:tcPr anchor="ctr" marT="50800" marB="50800">
-                    <a:solidFill>
-                      <a:srgbClr val="FFFFFF"/>
-                    </a:solidFill>
-                  </a:tcPr>
-                </a:tc>
-              </a:tr>
-              <a:tr h="407670">
-                <a:tc>
-                  <a:txBody>
-                    <a:bodyPr/>
-                    <a:lstStyle/>
-                    <a:p>
-                      <a:r>
-                        <a:rPr sz="1150">
-                          <a:solidFill>
-                            <a:srgbClr val="222A24"/>
-                          </a:solidFill>
-                          <a:latin typeface="Calibri"/>
-                        </a:rPr>
-                        <a:t>2</a:t>
-                      </a:r>
-                    </a:p>
-                  </a:txBody>
-                  <a:tcPr anchor="ctr" marT="50800" marB="50800">
-                    <a:solidFill>
-                      <a:srgbClr val="F1ECDD"/>
-                    </a:solidFill>
-                  </a:tcPr>
-                </a:tc>
-                <a:tc>
-                  <a:txBody>
-                    <a:bodyPr/>
-                    <a:lstStyle/>
-                    <a:p>
-                      <a:r>
-                        <a:rPr sz="1150">
-                          <a:solidFill>
-                            <a:srgbClr val="222A24"/>
-                          </a:solidFill>
-                          <a:latin typeface="Calibri"/>
-                        </a:rPr>
-                        <a:t>/bmad-forge-idea</a:t>
-                      </a:r>
-                    </a:p>
-                  </a:txBody>
-                  <a:tcPr anchor="ctr" marT="50800" marB="50800">
-                    <a:solidFill>
-                      <a:srgbClr val="F1ECDD"/>
-                    </a:solidFill>
-                  </a:tcPr>
-                </a:tc>
-                <a:tc>
-                  <a:txBody>
-                    <a:bodyPr/>
-                    <a:lstStyle/>
-                    <a:p>
-                      <a:r>
-                        <a:rPr sz="1150">
-                          <a:solidFill>
-                            <a:srgbClr val="222A24"/>
-                          </a:solidFill>
-                          <a:latin typeface="Calibri"/>
-                        </a:rPr>
-                        <a:t>Pressure-tests an idea via persona-driven interrogation until it hardens, proves out, or dies cheaply.</a:t>
-                      </a:r>
-                    </a:p>
-                  </a:txBody>
-                  <a:tcPr anchor="ctr" marT="50800" marB="50800">
-                    <a:solidFill>
-                      <a:srgbClr val="F1ECDD"/>
-                    </a:solidFill>
-                  </a:tcPr>
-                </a:tc>
-              </a:tr>
-              <a:tr h="407670">
-                <a:tc>
-                  <a:txBody>
-                    <a:bodyPr/>
-                    <a:lstStyle/>
-                    <a:p>
-                      <a:r>
-                        <a:rPr sz="1150">
-                          <a:solidFill>
-                            <a:srgbClr val="222A24"/>
-                          </a:solidFill>
-                          <a:latin typeface="Calibri"/>
-                        </a:rPr>
-                        <a:t>3</a:t>
-                      </a:r>
-                    </a:p>
-                  </a:txBody>
-                  <a:tcPr anchor="ctr" marT="50800" marB="50800">
-                    <a:solidFill>
-                      <a:srgbClr val="FFFFFF"/>
-                    </a:solidFill>
-                  </a:tcPr>
-                </a:tc>
-                <a:tc>
-                  <a:txBody>
-                    <a:bodyPr/>
-                    <a:lstStyle/>
-                    <a:p>
-                      <a:r>
-                        <a:rPr sz="1150">
-                          <a:solidFill>
-                            <a:srgbClr val="222A24"/>
-                          </a:solidFill>
-                          <a:latin typeface="Calibri"/>
-                        </a:rPr>
-                        <a:t>/bmad-project-context</a:t>
-                      </a:r>
-                    </a:p>
-                  </a:txBody>
-                  <a:tcPr anchor="ctr" marT="50800" marB="50800">
-                    <a:solidFill>
-                      <a:srgbClr val="FFFFFF"/>
-                    </a:solidFill>
-                  </a:tcPr>
-                </a:tc>
-                <a:tc>
-                  <a:txBody>
-                    <a:bodyPr/>
-                    <a:lstStyle/>
-                    <a:p>
-                      <a:r>
-                        <a:rPr sz="1150">
-                          <a:solidFill>
-                            <a:srgbClr val="222A24"/>
-                          </a:solidFill>
-                          <a:latin typeface="Calibri"/>
-                        </a:rPr>
-                        <a:t>Generates project-context.md — the AI working rules/conventions for the whole project.</a:t>
-                      </a:r>
-                    </a:p>
-                  </a:txBody>
-                  <a:tcPr anchor="ctr" marT="50800" marB="50800">
-                    <a:solidFill>
-                      <a:srgbClr val="FFFFFF"/>
-                    </a:solidFill>
-                  </a:tcPr>
-                </a:tc>
-              </a:tr>
-              <a:tr h="407670">
-                <a:tc>
-                  <a:txBody>
-                    <a:bodyPr/>
-                    <a:lstStyle/>
-                    <a:p>
-                      <a:r>
-                        <a:rPr sz="1150">
-                          <a:solidFill>
-                            <a:srgbClr val="222A24"/>
-                          </a:solidFill>
-                          <a:latin typeface="Calibri"/>
-                        </a:rPr>
-                        <a:t>4</a:t>
-                      </a:r>
-                    </a:p>
-                  </a:txBody>
-                  <a:tcPr anchor="ctr" marT="50800" marB="50800">
-                    <a:solidFill>
-                      <a:srgbClr val="F1ECDD"/>
-                    </a:solidFill>
-                  </a:tcPr>
-                </a:tc>
-                <a:tc>
-                  <a:txBody>
-                    <a:bodyPr/>
-                    <a:lstStyle/>
-                    <a:p>
-                      <a:r>
-                        <a:rPr sz="1150">
-                          <a:solidFill>
-                            <a:srgbClr val="222A24"/>
-                          </a:solidFill>
-                          <a:latin typeface="Calibri"/>
-                        </a:rPr>
-                        <a:t>/bmad-cis-agent-design-thinking-coach</a:t>
-                      </a:r>
-                    </a:p>
-                  </a:txBody>
-                  <a:tcPr anchor="ctr" marT="50800" marB="50800">
-                    <a:solidFill>
-                      <a:srgbClr val="F1ECDD"/>
-                    </a:solidFill>
-                  </a:tcPr>
-                </a:tc>
-                <a:tc>
-                  <a:txBody>
-                    <a:bodyPr/>
-                    <a:lstStyle/>
-                    <a:p>
-                      <a:r>
-                        <a:rPr sz="1150">
-                          <a:solidFill>
-                            <a:srgbClr val="222A24"/>
-                          </a:solidFill>
-                          <a:latin typeface="Calibri"/>
-                        </a:rPr>
-                        <a:t>Maya: guides empathy-driven, human-centered design thinking sessions.</a:t>
-                      </a:r>
-                    </a:p>
-                  </a:txBody>
-                  <a:tcPr anchor="ctr" marT="50800" marB="50800">
-                    <a:solidFill>
-                      <a:srgbClr val="F1ECDD"/>
-                    </a:solidFill>
-                  </a:tcPr>
-                </a:tc>
-              </a:tr>
-              <a:tr h="407670">
-                <a:tc>
-                  <a:txBody>
-                    <a:bodyPr/>
-                    <a:lstStyle/>
-                    <a:p>
-                      <a:r>
-                        <a:rPr sz="1150">
-                          <a:solidFill>
-                            <a:srgbClr val="222A24"/>
-                          </a:solidFill>
-                          <a:latin typeface="Calibri"/>
-                        </a:rPr>
-                        <a:t>5</a:t>
-                      </a:r>
-                    </a:p>
-                  </a:txBody>
-                  <a:tcPr anchor="ctr" marT="50800" marB="50800">
-                    <a:solidFill>
-                      <a:srgbClr val="FFFFFF"/>
-                    </a:solidFill>
-                  </a:tcPr>
-                </a:tc>
-                <a:tc>
-                  <a:txBody>
-                    <a:bodyPr/>
-                    <a:lstStyle/>
-                    <a:p>
-                      <a:r>
-                        <a:rPr sz="1150">
-                          <a:solidFill>
-                            <a:srgbClr val="222A24"/>
-                          </a:solidFill>
-                          <a:latin typeface="Calibri"/>
-                        </a:rPr>
-                        <a:t>/bmad-cis-agent-innovation-coach</a:t>
-                      </a:r>
-                    </a:p>
-                  </a:txBody>
-                  <a:tcPr anchor="ctr" marT="50800" marB="50800">
-                    <a:solidFill>
-                      <a:srgbClr val="FFFFFF"/>
-                    </a:solidFill>
-                  </a:tcPr>
-                </a:tc>
-                <a:tc>
-                  <a:txBody>
-                    <a:bodyPr/>
-                    <a:lstStyle/>
-                    <a:p>
-                      <a:r>
-                        <a:rPr sz="1150">
-                          <a:solidFill>
-                            <a:srgbClr val="222A24"/>
-                          </a:solidFill>
-                          <a:latin typeface="Calibri"/>
-                        </a:rPr>
-                        <a:t>Victor: disruptive-innovation strategist finding business-model disruption angles.</a:t>
-                      </a:r>
-                    </a:p>
-                  </a:txBody>
-                  <a:tcPr anchor="ctr" marT="50800" marB="50800">
-                    <a:solidFill>
-                      <a:srgbClr val="FFFFFF"/>
-                    </a:solidFill>
-                  </a:tcPr>
-                </a:tc>
-              </a:tr>
-              <a:tr h="407670">
-                <a:tc>
-                  <a:txBody>
-                    <a:bodyPr/>
-                    <a:lstStyle/>
-                    <a:p>
-                      <a:r>
-                        <a:rPr sz="1150">
-                          <a:solidFill>
-                            <a:srgbClr val="222A24"/>
-                          </a:solidFill>
-                          <a:latin typeface="Calibri"/>
-                        </a:rPr>
-                        <a:t>6</a:t>
-                      </a:r>
-                    </a:p>
-                  </a:txBody>
-                  <a:tcPr anchor="ctr" marT="50800" marB="50800">
-                    <a:solidFill>
-                      <a:srgbClr val="F1ECDD"/>
-                    </a:solidFill>
-                  </a:tcPr>
-                </a:tc>
-                <a:tc>
-                  <a:txBody>
-                    <a:bodyPr/>
-                    <a:lstStyle/>
-                    <a:p>
-                      <a:r>
-                        <a:rPr sz="1150">
-                          <a:solidFill>
-                            <a:srgbClr val="222A24"/>
-                          </a:solidFill>
-                          <a:latin typeface="Calibri"/>
-                        </a:rPr>
-                        <a:t>/bmad-market-research</a:t>
-                      </a:r>
-                    </a:p>
-                  </a:txBody>
-                  <a:tcPr anchor="ctr" marT="50800" marB="50800">
-                    <a:solidFill>
-                      <a:srgbClr val="F1ECDD"/>
-                    </a:solidFill>
-                  </a:tcPr>
-                </a:tc>
-                <a:tc>
-                  <a:txBody>
-                    <a:bodyPr/>
-                    <a:lstStyle/>
-                    <a:p>
-                      <a:r>
-                        <a:rPr sz="1150">
-                          <a:solidFill>
-                            <a:srgbClr val="222A24"/>
-                          </a:solidFill>
-                          <a:latin typeface="Calibri"/>
-                        </a:rPr>
-                        <a:t>Researches the competitive market and target customers.</a:t>
-                      </a:r>
-                    </a:p>
-                  </a:txBody>
-                  <a:tcPr anchor="ctr" marT="50800" marB="50800">
-                    <a:solidFill>
-                      <a:srgbClr val="F1ECDD"/>
-                    </a:solidFill>
-                  </a:tcPr>
-                </a:tc>
-              </a:tr>
-              <a:tr h="407670">
-                <a:tc>
-                  <a:txBody>
-                    <a:bodyPr/>
-                    <a:lstStyle/>
-                    <a:p>
-                      <a:r>
-                        <a:rPr sz="1150">
-                          <a:solidFill>
-                            <a:srgbClr val="222A24"/>
-                          </a:solidFill>
-                          <a:latin typeface="Calibri"/>
-                        </a:rPr>
-                        <a:t>7</a:t>
-                      </a:r>
-                    </a:p>
-                  </a:txBody>
-                  <a:tcPr anchor="ctr" marT="50800" marB="50800">
-                    <a:solidFill>
-                      <a:srgbClr val="FFFFFF"/>
-                    </a:solidFill>
-                  </a:tcPr>
-                </a:tc>
-                <a:tc>
-                  <a:txBody>
-                    <a:bodyPr/>
-                    <a:lstStyle/>
-                    <a:p>
-                      <a:r>
-                        <a:rPr sz="1150">
-                          <a:solidFill>
-                            <a:srgbClr val="222A24"/>
-                          </a:solidFill>
-                          <a:latin typeface="Calibri"/>
-                        </a:rPr>
-                        <a:t>/bmad-domain-research</a:t>
-                      </a:r>
-                    </a:p>
-                  </a:txBody>
-                  <a:tcPr anchor="ctr" marT="50800" marB="50800">
-                    <a:solidFill>
-                      <a:srgbClr val="FFFFFF"/>
-                    </a:solidFill>
-                  </a:tcPr>
-                </a:tc>
-                <a:tc>
-                  <a:txBody>
-                    <a:bodyPr/>
-                    <a:lstStyle/>
-                    <a:p>
-                      <a:r>
-                        <a:rPr sz="1150">
-                          <a:solidFill>
-                            <a:srgbClr val="222A24"/>
-                          </a:solidFill>
-                          <a:latin typeface="Calibri"/>
-                        </a:rPr>
-                        <a:t>Researches the domain/industry the product operates in.</a:t>
-                      </a:r>
-                    </a:p>
-                  </a:txBody>
-                  <a:tcPr anchor="ctr" marT="50800" marB="50800">
-                    <a:solidFill>
-                      <a:srgbClr val="FFFFFF"/>
-                    </a:solidFill>
-                  </a:tcPr>
-                </a:tc>
-              </a:tr>
-              <a:tr h="407670">
-                <a:tc>
-                  <a:txBody>
-                    <a:bodyPr/>
-                    <a:lstStyle/>
-                    <a:p>
-                      <a:r>
-                        <a:rPr sz="1150">
-                          <a:solidFill>
-                            <a:srgbClr val="222A24"/>
-                          </a:solidFill>
-                          <a:latin typeface="Calibri"/>
-                        </a:rPr>
-                        <a:t>8</a:t>
-                      </a:r>
-                    </a:p>
-                  </a:txBody>
-                  <a:tcPr anchor="ctr" marT="50800" marB="50800">
-                    <a:solidFill>
-                      <a:srgbClr val="F1ECDD"/>
-                    </a:solidFill>
-                  </a:tcPr>
-                </a:tc>
-                <a:tc>
-                  <a:txBody>
-                    <a:bodyPr/>
-                    <a:lstStyle/>
-                    <a:p>
-                      <a:r>
-                        <a:rPr sz="1150">
-                          <a:solidFill>
-                            <a:srgbClr val="222A24"/>
-                          </a:solidFill>
-                          <a:latin typeface="Calibri"/>
-                        </a:rPr>
-                        <a:t>/bmad-technical-research</a:t>
-                      </a:r>
-                    </a:p>
-                  </a:txBody>
-                  <a:tcPr anchor="ctr" marT="50800" marB="50800">
-                    <a:solidFill>
-                      <a:srgbClr val="F1ECDD"/>
-                    </a:solidFill>
-                  </a:tcPr>
-                </a:tc>
-                <a:tc>
-                  <a:txBody>
-                    <a:bodyPr/>
-                    <a:lstStyle/>
-                    <a:p>
-                      <a:r>
-                        <a:rPr sz="1150">
-                          <a:solidFill>
-                            <a:srgbClr val="222A24"/>
-                          </a:solidFill>
-                          <a:latin typeface="Calibri"/>
-                        </a:rPr>
-                        <a:t>Researches candidate technologies, stacks, and architecture approaches.</a:t>
-                      </a:r>
-                    </a:p>
-                  </a:txBody>
-                  <a:tcPr anchor="ctr" marT="50800" marB="50800">
-                    <a:solidFill>
-                      <a:srgbClr val="F1ECDD"/>
-                    </a:solidFill>
-                  </a:tcPr>
-                </a:tc>
-              </a:tr>
-              <a:tr h="407670">
-                <a:tc>
-                  <a:txBody>
-                    <a:bodyPr/>
-                    <a:lstStyle/>
-                    <a:p>
-                      <a:r>
-                        <a:rPr sz="1150">
-                          <a:solidFill>
-                            <a:srgbClr val="222A24"/>
-                          </a:solidFill>
-                          <a:latin typeface="Calibri"/>
-                        </a:rPr>
-                        <a:t>9</a:t>
-                      </a:r>
-                    </a:p>
-                  </a:txBody>
-                  <a:tcPr anchor="ctr" marT="50800" marB="50800">
-                    <a:solidFill>
-                      <a:srgbClr val="FFFFFF"/>
-                    </a:solidFill>
-                  </a:tcPr>
-                </a:tc>
-                <a:tc>
-                  <a:txBody>
-                    <a:bodyPr/>
-                    <a:lstStyle/>
-                    <a:p>
-                      <a:r>
-                        <a:rPr sz="1150">
-                          <a:solidFill>
-                            <a:srgbClr val="222A24"/>
-                          </a:solidFill>
-                          <a:latin typeface="Calibri"/>
-                        </a:rPr>
-                        <a:t>/bmad-product-brief</a:t>
-                      </a:r>
-                    </a:p>
-                  </a:txBody>
-                  <a:tcPr anchor="ctr" marT="50800" marB="50800">
-                    <a:solidFill>
-                      <a:srgbClr val="FFFFFF"/>
-                    </a:solidFill>
-                  </a:tcPr>
-                </a:tc>
-                <a:tc>
-                  <a:txBody>
-                    <a:bodyPr/>
-                    <a:lstStyle/>
-                    <a:p>
-                      <a:r>
-                        <a:rPr sz="1150">
-                          <a:solidFill>
-                            <a:srgbClr val="222A24"/>
-                          </a:solidFill>
-                          <a:latin typeface="Calibri"/>
-                        </a:rPr>
-                        <a:t>Produces/validates the product brief — vision, users, positioning, business case.</a:t>
-                      </a:r>
-                    </a:p>
-                  </a:txBody>
-                  <a:tcPr anchor="ctr" marT="50800" marB="50800">
-                    <a:solidFill>
-                      <a:srgbClr val="FFFFFF"/>
-                    </a:solidFill>
-                  </a:tcPr>
-                </a:tc>
-              </a:tr>
-              <a:tr h="407670">
-                <a:tc>
-                  <a:txBody>
-                    <a:bodyPr/>
-                    <a:lstStyle/>
-                    <a:p>
-                      <a:r>
-                        <a:rPr sz="1150">
-                          <a:solidFill>
-                            <a:srgbClr val="222A24"/>
-                          </a:solidFill>
-                          <a:latin typeface="Calibri"/>
-                        </a:rPr>
-                        <a:t>10</a:t>
-                      </a:r>
-                    </a:p>
-                  </a:txBody>
-                  <a:tcPr anchor="ctr" marT="50800" marB="50800">
-                    <a:solidFill>
-                      <a:srgbClr val="F1ECDD"/>
-                    </a:solidFill>
-                  </a:tcPr>
-                </a:tc>
-                <a:tc>
-                  <a:txBody>
-                    <a:bodyPr/>
-                    <a:lstStyle/>
-                    <a:p>
-                      <a:r>
-                        <a:rPr sz="1150">
-                          <a:solidFill>
-                            <a:srgbClr val="222A24"/>
-                          </a:solidFill>
-                          <a:latin typeface="Calibri"/>
-                        </a:rPr>
-                        <a:t>/bmad-prfaq</a:t>
-                      </a:r>
-                    </a:p>
-                  </a:txBody>
-                  <a:tcPr anchor="ctr" marT="50800" marB="50800">
-                    <a:solidFill>
-                      <a:srgbClr val="F1ECDD"/>
-                    </a:solidFill>
-                  </a:tcPr>
-                </a:tc>
-                <a:tc>
-                  <a:txBody>
-                    <a:bodyPr/>
-                    <a:lstStyle/>
-                    <a:p>
-                      <a:r>
-                        <a:rPr sz="1150">
-                          <a:solidFill>
-                            <a:srgbClr val="222A24"/>
-                          </a:solidFill>
-                          <a:latin typeface="Calibri"/>
-                        </a:rPr>
-                        <a:t>Runs a Working-Backwards PRFAQ challenge to stress-test the concept customer-first.</a:t>
-                      </a:r>
-                    </a:p>
-                  </a:txBody>
-                  <a:tcPr anchor="ctr" marT="50800" marB="50800">
-                    <a:solidFill>
-                      <a:srgbClr val="F1ECDD"/>
-                    </a:solidFill>
-                  </a:tcPr>
-                </a:tc>
-              </a:tr>
-              <a:tr h="407670">
-                <a:tc>
-                  <a:txBody>
-                    <a:bodyPr/>
-                    <a:lstStyle/>
-                    <a:p>
-                      <a:r>
-                        <a:rPr sz="1150">
-                          <a:solidFill>
-                            <a:srgbClr val="222A24"/>
-                          </a:solidFill>
-                          <a:latin typeface="Calibri"/>
-                        </a:rPr>
-                        <a:t>11</a:t>
-                      </a:r>
-                    </a:p>
-                  </a:txBody>
-                  <a:tcPr anchor="ctr" marT="50800" marB="50800">
-                    <a:solidFill>
-                      <a:srgbClr val="FFFFFF"/>
-                    </a:solidFill>
-                  </a:tcPr>
-                </a:tc>
-                <a:tc>
-                  <a:txBody>
-                    <a:bodyPr/>
-                    <a:lstStyle/>
-                    <a:p>
-                      <a:r>
-                        <a:rPr sz="1150">
-                          <a:solidFill>
-                            <a:srgbClr val="222A24"/>
-                          </a:solidFill>
-                          <a:latin typeface="Calibri"/>
-                        </a:rPr>
-                        <a:t>/wds-1-project-brief</a:t>
-                      </a:r>
-                    </a:p>
-                  </a:txBody>
-                  <a:tcPr anchor="ctr" marT="50800" marB="50800">
-                    <a:solidFill>
-                      <a:srgbClr val="FFFFFF"/>
-                    </a:solidFill>
-                  </a:tcPr>
-                </a:tc>
-                <a:tc>
-                  <a:txBody>
-                    <a:bodyPr/>
-                    <a:lstStyle/>
-                    <a:p>
-                      <a:r>
-                        <a:rPr sz="1150">
-                          <a:solidFill>
-                            <a:srgbClr val="222A24"/>
-                          </a:solidFill>
-                          <a:latin typeface="Calibri"/>
-                        </a:rPr>
-                        <a:t>Establishes the WDS project foundation that all downstream design work builds on.</a:t>
-                      </a:r>
-                    </a:p>
-                  </a:txBody>
-                  <a:tcPr anchor="ctr" marT="50800" marB="50800">
-                    <a:solidFill>
-                      <a:srgbClr val="FFFFFF"/>
-                    </a:solidFill>
-                  </a:tcPr>
-                </a:tc>
-              </a:tr>
-            </a:tbl>
-          </a:graphicData>
-        </a:graphic>
-      </p:graphicFrame>
-    </p:spTree>
-  </p:cSld>
-  <p:clrMapOvr>
-    <a:masterClrMapping/>
-  </p:clrMapOvr>
-</p:sld>
-</file>
-
 <file path=ppt/theme/theme1.xml><?xml version="1.0" encoding="utf-8"?>
 <a:theme xmlns:a="http://schemas.openxmlformats.org/drawingml/2006/main" name="Office Theme">
   <a:themeElements>
